--- a/Apresentação.pptx
+++ b/Apresentação.pptx
@@ -167,252 +167,6 @@
 <p:cmAuthorLst xmlns:a="http://schemas.openxmlformats.org/drawingml/2006/main" xmlns:r="http://schemas.openxmlformats.org/officeDocument/2006/relationships" xmlns:p="http://schemas.openxmlformats.org/presentationml/2006/main">
   <p:cmAuthor id="0" name="RENATA" initials="R" lastIdx="10" clrIdx="0"/>
 </p:cmAuthorLst>
-</file>
-
-<file path=ppt/revisionInfo.xml><?xml version="1.0" encoding="utf-8"?>
-<p1510:revInfo xmlns:a="http://schemas.openxmlformats.org/drawingml/2006/main" xmlns:r="http://schemas.openxmlformats.org/officeDocument/2006/relationships" xmlns:p1510="http://schemas.microsoft.com/office/powerpoint/2015/10/main">
-  <p1510:revLst>
-    <p1510:client id="{3DA2EC0E-3A60-4B0B-A9BF-3CB2279CC864}" v="28" dt="2025-05-22T21:51:34.202"/>
-  </p1510:revLst>
-</p1510:revInfo>
-</file>
-
-<file path=ppt/changesInfos/changesInfo1.xml><?xml version="1.0" encoding="utf-8"?>
-<pc:chgInfo xmlns:a="http://schemas.openxmlformats.org/drawingml/2006/main" xmlns:r="http://schemas.openxmlformats.org/officeDocument/2006/relationships" xmlns:ac="http://schemas.microsoft.com/office/drawing/2013/main/command" xmlns:pc="http://schemas.microsoft.com/office/powerpoint/2013/main/command">
-  <pc:docChgLst>
-    <pc:chgData name="Renata Costa" userId="c96d403436fc1ebf" providerId="LiveId" clId="{3DA2EC0E-3A60-4B0B-A9BF-3CB2279CC864}"/>
-    <pc:docChg chg="undo custSel addSld modSld">
-      <pc:chgData name="Renata Costa" userId="c96d403436fc1ebf" providerId="LiveId" clId="{3DA2EC0E-3A60-4B0B-A9BF-3CB2279CC864}" dt="2025-05-22T21:53:12.556" v="415" actId="6549"/>
-      <pc:docMkLst>
-        <pc:docMk/>
-      </pc:docMkLst>
-      <pc:sldChg chg="modSp mod">
-        <pc:chgData name="Renata Costa" userId="c96d403436fc1ebf" providerId="LiveId" clId="{3DA2EC0E-3A60-4B0B-A9BF-3CB2279CC864}" dt="2025-05-22T21:53:12.556" v="415" actId="6549"/>
-        <pc:sldMkLst>
-          <pc:docMk/>
-          <pc:sldMk cId="0" sldId="257"/>
-        </pc:sldMkLst>
-        <pc:spChg chg="mod">
-          <ac:chgData name="Renata Costa" userId="c96d403436fc1ebf" providerId="LiveId" clId="{3DA2EC0E-3A60-4B0B-A9BF-3CB2279CC864}" dt="2025-05-22T21:43:01.032" v="3" actId="20577"/>
-          <ac:spMkLst>
-            <pc:docMk/>
-            <pc:sldMk cId="0" sldId="257"/>
-            <ac:spMk id="2" creationId="{00000000-0000-0000-0000-000000000000}"/>
-          </ac:spMkLst>
-        </pc:spChg>
-        <pc:spChg chg="mod">
-          <ac:chgData name="Renata Costa" userId="c96d403436fc1ebf" providerId="LiveId" clId="{3DA2EC0E-3A60-4B0B-A9BF-3CB2279CC864}" dt="2025-05-22T21:53:12.556" v="415" actId="6549"/>
-          <ac:spMkLst>
-            <pc:docMk/>
-            <pc:sldMk cId="0" sldId="257"/>
-            <ac:spMk id="8" creationId="{2153AA99-8F89-44F6-89BE-50ADB104D03D}"/>
-          </ac:spMkLst>
-        </pc:spChg>
-        <pc:spChg chg="mod">
-          <ac:chgData name="Renata Costa" userId="c96d403436fc1ebf" providerId="LiveId" clId="{3DA2EC0E-3A60-4B0B-A9BF-3CB2279CC864}" dt="2025-05-22T21:43:06.429" v="16" actId="20577"/>
-          <ac:spMkLst>
-            <pc:docMk/>
-            <pc:sldMk cId="0" sldId="257"/>
-            <ac:spMk id="9" creationId="{2153AA99-8F89-44F6-89BE-50ADB104D03D}"/>
-          </ac:spMkLst>
-        </pc:spChg>
-        <pc:spChg chg="mod">
-          <ac:chgData name="Renata Costa" userId="c96d403436fc1ebf" providerId="LiveId" clId="{3DA2EC0E-3A60-4B0B-A9BF-3CB2279CC864}" dt="2025-05-22T21:49:05.696" v="206" actId="20577"/>
-          <ac:spMkLst>
-            <pc:docMk/>
-            <pc:sldMk cId="0" sldId="257"/>
-            <ac:spMk id="10" creationId="{2153AA99-8F89-44F6-89BE-50ADB104D03D}"/>
-          </ac:spMkLst>
-        </pc:spChg>
-        <pc:spChg chg="mod">
-          <ac:chgData name="Renata Costa" userId="c96d403436fc1ebf" providerId="LiveId" clId="{3DA2EC0E-3A60-4B0B-A9BF-3CB2279CC864}" dt="2025-05-22T21:50:19.630" v="298" actId="20577"/>
-          <ac:spMkLst>
-            <pc:docMk/>
-            <pc:sldMk cId="0" sldId="257"/>
-            <ac:spMk id="3076" creationId="{2153AA99-8F89-44F6-89BE-50ADB104D03D}"/>
-          </ac:spMkLst>
-        </pc:spChg>
-      </pc:sldChg>
-      <pc:sldChg chg="addSp modSp mod modCm">
-        <pc:chgData name="Renata Costa" userId="c96d403436fc1ebf" providerId="LiveId" clId="{3DA2EC0E-3A60-4B0B-A9BF-3CB2279CC864}" dt="2025-05-22T21:51:12.414" v="346"/>
-        <pc:sldMkLst>
-          <pc:docMk/>
-          <pc:sldMk cId="0" sldId="258"/>
-        </pc:sldMkLst>
-        <pc:spChg chg="mod">
-          <ac:chgData name="Renata Costa" userId="c96d403436fc1ebf" providerId="LiveId" clId="{3DA2EC0E-3A60-4B0B-A9BF-3CB2279CC864}" dt="2025-05-22T21:50:59.816" v="344" actId="6549"/>
-          <ac:spMkLst>
-            <pc:docMk/>
-            <pc:sldMk cId="0" sldId="258"/>
-            <ac:spMk id="4100" creationId="{D09F245C-E224-40FB-B22C-C18326684718}"/>
-          </ac:spMkLst>
-        </pc:spChg>
-        <pc:picChg chg="add mod">
-          <ac:chgData name="Renata Costa" userId="c96d403436fc1ebf" providerId="LiveId" clId="{3DA2EC0E-3A60-4B0B-A9BF-3CB2279CC864}" dt="2025-05-22T21:51:12.414" v="346"/>
-          <ac:picMkLst>
-            <pc:docMk/>
-            <pc:sldMk cId="0" sldId="258"/>
-            <ac:picMk id="2" creationId="{825EFEA0-FEEF-25D4-44D2-3DE30B5CE709}"/>
-          </ac:picMkLst>
-        </pc:picChg>
-      </pc:sldChg>
-      <pc:sldChg chg="addSp delSp modSp mod modCm">
-        <pc:chgData name="Renata Costa" userId="c96d403436fc1ebf" providerId="LiveId" clId="{3DA2EC0E-3A60-4B0B-A9BF-3CB2279CC864}" dt="2025-05-22T21:45:25.345" v="64"/>
-        <pc:sldMkLst>
-          <pc:docMk/>
-          <pc:sldMk cId="1004270343" sldId="262"/>
-        </pc:sldMkLst>
-        <pc:spChg chg="add mod">
-          <ac:chgData name="Renata Costa" userId="c96d403436fc1ebf" providerId="LiveId" clId="{3DA2EC0E-3A60-4B0B-A9BF-3CB2279CC864}" dt="2025-05-22T21:45:09.967" v="63" actId="1076"/>
-          <ac:spMkLst>
-            <pc:docMk/>
-            <pc:sldMk cId="1004270343" sldId="262"/>
-            <ac:spMk id="2" creationId="{3C6B2C7A-E59D-5A67-500D-5262D5121C16}"/>
-          </ac:spMkLst>
-        </pc:spChg>
-        <pc:spChg chg="del mod">
-          <ac:chgData name="Renata Costa" userId="c96d403436fc1ebf" providerId="LiveId" clId="{3DA2EC0E-3A60-4B0B-A9BF-3CB2279CC864}" dt="2025-05-22T21:44:09.667" v="42" actId="478"/>
-          <ac:spMkLst>
-            <pc:docMk/>
-            <pc:sldMk cId="1004270343" sldId="262"/>
-            <ac:spMk id="4100" creationId="{D09F245C-E224-40FB-B22C-C18326684718}"/>
-          </ac:spMkLst>
-        </pc:spChg>
-        <pc:picChg chg="mod">
-          <ac:chgData name="Renata Costa" userId="c96d403436fc1ebf" providerId="LiveId" clId="{3DA2EC0E-3A60-4B0B-A9BF-3CB2279CC864}" dt="2025-05-22T21:44:23.530" v="48" actId="1076"/>
-          <ac:picMkLst>
-            <pc:docMk/>
-            <pc:sldMk cId="1004270343" sldId="262"/>
-            <ac:picMk id="4099" creationId="{A9EB0ED6-083B-4BFA-9C57-A71D9212A144}"/>
-          </ac:picMkLst>
-        </pc:picChg>
-      </pc:sldChg>
-      <pc:sldChg chg="addSp delSp modSp mod">
-        <pc:chgData name="Renata Costa" userId="c96d403436fc1ebf" providerId="LiveId" clId="{3DA2EC0E-3A60-4B0B-A9BF-3CB2279CC864}" dt="2025-05-22T21:46:19.352" v="113"/>
-        <pc:sldMkLst>
-          <pc:docMk/>
-          <pc:sldMk cId="2149392476" sldId="263"/>
-        </pc:sldMkLst>
-        <pc:spChg chg="add del">
-          <ac:chgData name="Renata Costa" userId="c96d403436fc1ebf" providerId="LiveId" clId="{3DA2EC0E-3A60-4B0B-A9BF-3CB2279CC864}" dt="2025-05-22T21:45:36.266" v="67" actId="22"/>
-          <ac:spMkLst>
-            <pc:docMk/>
-            <pc:sldMk cId="2149392476" sldId="263"/>
-            <ac:spMk id="3" creationId="{B6818BE9-28B0-787C-3CFD-F8A72C475623}"/>
-          </ac:spMkLst>
-        </pc:spChg>
-        <pc:spChg chg="add mod">
-          <ac:chgData name="Renata Costa" userId="c96d403436fc1ebf" providerId="LiveId" clId="{3DA2EC0E-3A60-4B0B-A9BF-3CB2279CC864}" dt="2025-05-22T21:46:19.352" v="113"/>
-          <ac:spMkLst>
-            <pc:docMk/>
-            <pc:sldMk cId="2149392476" sldId="263"/>
-            <ac:spMk id="4" creationId="{01DEED65-4293-70B7-FE9D-9EBEBFE6AC1C}"/>
-          </ac:spMkLst>
-        </pc:spChg>
-        <pc:spChg chg="del">
-          <ac:chgData name="Renata Costa" userId="c96d403436fc1ebf" providerId="LiveId" clId="{3DA2EC0E-3A60-4B0B-A9BF-3CB2279CC864}" dt="2025-05-22T21:45:32.597" v="65" actId="478"/>
-          <ac:spMkLst>
-            <pc:docMk/>
-            <pc:sldMk cId="2149392476" sldId="263"/>
-            <ac:spMk id="4100" creationId="{D09F245C-E224-40FB-B22C-C18326684718}"/>
-          </ac:spMkLst>
-        </pc:spChg>
-      </pc:sldChg>
-      <pc:sldChg chg="addSp delSp modSp modCm">
-        <pc:chgData name="Renata Costa" userId="c96d403436fc1ebf" providerId="LiveId" clId="{3DA2EC0E-3A60-4B0B-A9BF-3CB2279CC864}" dt="2025-05-22T21:47:32.530" v="122"/>
-        <pc:sldMkLst>
-          <pc:docMk/>
-          <pc:sldMk cId="3575197018" sldId="264"/>
-        </pc:sldMkLst>
-        <pc:spChg chg="add mod">
-          <ac:chgData name="Renata Costa" userId="c96d403436fc1ebf" providerId="LiveId" clId="{3DA2EC0E-3A60-4B0B-A9BF-3CB2279CC864}" dt="2025-05-22T21:47:09.085" v="121" actId="1076"/>
-          <ac:spMkLst>
-            <pc:docMk/>
-            <pc:sldMk cId="3575197018" sldId="264"/>
-            <ac:spMk id="2" creationId="{3BAA0655-280C-904A-F03E-0947DA860559}"/>
-          </ac:spMkLst>
-        </pc:spChg>
-        <pc:spChg chg="del">
-          <ac:chgData name="Renata Costa" userId="c96d403436fc1ebf" providerId="LiveId" clId="{3DA2EC0E-3A60-4B0B-A9BF-3CB2279CC864}" dt="2025-05-22T21:46:50.602" v="116" actId="478"/>
-          <ac:spMkLst>
-            <pc:docMk/>
-            <pc:sldMk cId="3575197018" sldId="264"/>
-            <ac:spMk id="4100" creationId="{D09F245C-E224-40FB-B22C-C18326684718}"/>
-          </ac:spMkLst>
-        </pc:spChg>
-        <pc:picChg chg="mod">
-          <ac:chgData name="Renata Costa" userId="c96d403436fc1ebf" providerId="LiveId" clId="{3DA2EC0E-3A60-4B0B-A9BF-3CB2279CC864}" dt="2025-05-22T21:46:57.392" v="119" actId="1076"/>
-          <ac:picMkLst>
-            <pc:docMk/>
-            <pc:sldMk cId="3575197018" sldId="264"/>
-            <ac:picMk id="9" creationId="{A9EB0ED6-083B-4BFA-9C57-A71D9212A144}"/>
-          </ac:picMkLst>
-        </pc:picChg>
-      </pc:sldChg>
-      <pc:sldChg chg="delSp modSp mod modCm">
-        <pc:chgData name="Renata Costa" userId="c96d403436fc1ebf" providerId="LiveId" clId="{3DA2EC0E-3A60-4B0B-A9BF-3CB2279CC864}" dt="2025-05-22T21:48:42.792" v="204" actId="6549"/>
-        <pc:sldMkLst>
-          <pc:docMk/>
-          <pc:sldMk cId="1283984288" sldId="265"/>
-        </pc:sldMkLst>
-        <pc:spChg chg="mod">
-          <ac:chgData name="Renata Costa" userId="c96d403436fc1ebf" providerId="LiveId" clId="{3DA2EC0E-3A60-4B0B-A9BF-3CB2279CC864}" dt="2025-05-22T21:48:42.792" v="204" actId="6549"/>
-          <ac:spMkLst>
-            <pc:docMk/>
-            <pc:sldMk cId="1283984288" sldId="265"/>
-            <ac:spMk id="4100" creationId="{D09F245C-E224-40FB-B22C-C18326684718}"/>
-          </ac:spMkLst>
-        </pc:spChg>
-        <pc:picChg chg="del">
-          <ac:chgData name="Renata Costa" userId="c96d403436fc1ebf" providerId="LiveId" clId="{3DA2EC0E-3A60-4B0B-A9BF-3CB2279CC864}" dt="2025-05-22T21:47:39.309" v="123" actId="478"/>
-          <ac:picMkLst>
-            <pc:docMk/>
-            <pc:sldMk cId="1283984288" sldId="265"/>
-            <ac:picMk id="10" creationId="{00000000-0000-0000-0000-000000000000}"/>
-          </ac:picMkLst>
-        </pc:picChg>
-      </pc:sldChg>
-      <pc:sldChg chg="addSp delSp modSp">
-        <pc:chgData name="Renata Costa" userId="c96d403436fc1ebf" providerId="LiveId" clId="{3DA2EC0E-3A60-4B0B-A9BF-3CB2279CC864}" dt="2025-05-22T21:46:32.570" v="115"/>
-        <pc:sldMkLst>
-          <pc:docMk/>
-          <pc:sldMk cId="3472418953" sldId="266"/>
-        </pc:sldMkLst>
-        <pc:spChg chg="add mod">
-          <ac:chgData name="Renata Costa" userId="c96d403436fc1ebf" providerId="LiveId" clId="{3DA2EC0E-3A60-4B0B-A9BF-3CB2279CC864}" dt="2025-05-22T21:46:32.570" v="115"/>
-          <ac:spMkLst>
-            <pc:docMk/>
-            <pc:sldMk cId="3472418953" sldId="266"/>
-            <ac:spMk id="2" creationId="{BF27EDCF-BF92-8A03-B585-1969DD1D7166}"/>
-          </ac:spMkLst>
-        </pc:spChg>
-        <pc:spChg chg="del">
-          <ac:chgData name="Renata Costa" userId="c96d403436fc1ebf" providerId="LiveId" clId="{3DA2EC0E-3A60-4B0B-A9BF-3CB2279CC864}" dt="2025-05-22T21:46:31.642" v="114" actId="478"/>
-          <ac:spMkLst>
-            <pc:docMk/>
-            <pc:sldMk cId="3472418953" sldId="266"/>
-            <ac:spMk id="4100" creationId="{D09F245C-E224-40FB-B22C-C18326684718}"/>
-          </ac:spMkLst>
-        </pc:spChg>
-      </pc:sldChg>
-      <pc:sldChg chg="modSp add mod">
-        <pc:chgData name="Renata Costa" userId="c96d403436fc1ebf" providerId="LiveId" clId="{3DA2EC0E-3A60-4B0B-A9BF-3CB2279CC864}" dt="2025-05-22T21:51:50.364" v="384" actId="20577"/>
-        <pc:sldMkLst>
-          <pc:docMk/>
-          <pc:sldMk cId="2028430281" sldId="267"/>
-        </pc:sldMkLst>
-        <pc:spChg chg="mod">
-          <ac:chgData name="Renata Costa" userId="c96d403436fc1ebf" providerId="LiveId" clId="{3DA2EC0E-3A60-4B0B-A9BF-3CB2279CC864}" dt="2025-05-22T21:51:50.364" v="384" actId="20577"/>
-          <ac:spMkLst>
-            <pc:docMk/>
-            <pc:sldMk cId="2028430281" sldId="267"/>
-            <ac:spMk id="4100" creationId="{55F3FA2C-B60D-0465-6983-3F4AE419EBED}"/>
-          </ac:spMkLst>
-        </pc:spChg>
-      </pc:sldChg>
-    </pc:docChg>
-  </pc:docChgLst>
-</pc:chgInfo>
 </file>
 
 <file path=ppt/comments/comment1.xml><?xml version="1.0" encoding="utf-8"?>
@@ -6065,16 +5819,33 @@
             </a:lvl9pPr>
           </a:lstStyle>
           <a:p>
-            <a:pPr marL="171450" indent="-171450">
-              <a:buFont typeface="Wingdings" pitchFamily="2" charset="2"/>
-              <a:buChar char="ü"/>
-            </a:pPr>
+            <a:pPr marL="285750" indent="-285750"/>
             <a:r>
               <a:rPr lang="pt-BR" sz="1400" dirty="0">
                 <a:latin typeface="Verdana" pitchFamily="34" charset="0"/>
                 <a:ea typeface="Verdana" pitchFamily="34" charset="0"/>
               </a:rPr>
-              <a:t>SOMENTE TÓPICOS - PROBLEMÁTICA</a:t>
+              <a:t>A dificuldade de idosos no uso de aplicativos móveis governamentais</a:t>
+            </a:r>
+          </a:p>
+          <a:p>
+            <a:pPr marL="285750" indent="-285750"/>
+            <a:r>
+              <a:rPr lang="pt-BR" sz="1400" dirty="0">
+                <a:latin typeface="Verdana" pitchFamily="34" charset="0"/>
+                <a:ea typeface="Verdana" pitchFamily="34" charset="0"/>
+              </a:rPr>
+              <a:t>Exclusão digital decorrente da extinção de canais físicos de atendimento</a:t>
+            </a:r>
+          </a:p>
+          <a:p>
+            <a:pPr marL="285750" indent="-285750"/>
+            <a:r>
+              <a:rPr lang="pt-BR" sz="1400" dirty="0">
+                <a:latin typeface="Verdana" pitchFamily="34" charset="0"/>
+                <a:ea typeface="Verdana" pitchFamily="34" charset="0"/>
+              </a:rPr>
+              <a:t>Perda de autonomia e dependência de terceiros</a:t>
             </a:r>
           </a:p>
           <a:p>
@@ -6088,27 +5859,24 @@
             </a:endParaRPr>
           </a:p>
           <a:p>
-            <a:pPr marL="171450" indent="-171450">
-              <a:buFont typeface="Wingdings" pitchFamily="2" charset="2"/>
-              <a:buChar char="ü"/>
-            </a:pPr>
+            <a:pPr marL="285750" indent="-285750"/>
             <a:r>
               <a:rPr lang="pt-BR" sz="1400" dirty="0">
                 <a:latin typeface="Verdana" pitchFamily="34" charset="0"/>
                 <a:ea typeface="Verdana" pitchFamily="34" charset="0"/>
               </a:rPr>
-              <a:t>SOMENTE TÓPICOS - JUSTIFICATIVA</a:t>
-            </a:r>
-          </a:p>
-          <a:p>
-            <a:pPr marL="171450" indent="-171450">
-              <a:buFont typeface="Wingdings" pitchFamily="2" charset="2"/>
-              <a:buChar char="ü"/>
-            </a:pPr>
-            <a:endParaRPr lang="pt-BR" sz="1400" dirty="0">
-              <a:latin typeface="Verdana" pitchFamily="34" charset="0"/>
-              <a:ea typeface="Verdana" pitchFamily="34" charset="0"/>
-            </a:endParaRPr>
+              <a:t>Necessidade de preservar a autonomia e cidadania da terceira idade</a:t>
+            </a:r>
+          </a:p>
+          <a:p>
+            <a:pPr marL="285750" indent="-285750"/>
+            <a:r>
+              <a:rPr lang="pt-BR" sz="1400" dirty="0">
+                <a:latin typeface="Verdana" pitchFamily="34" charset="0"/>
+                <a:ea typeface="Verdana" pitchFamily="34" charset="0"/>
+              </a:rPr>
+              <a:t>Importância de garantir acesso igualitário aos serviços essenciais do Estado</a:t>
+            </a:r>
           </a:p>
           <a:p>
             <a:pPr>

--- a/Apresentação.pptx
+++ b/Apresentação.pptx
@@ -462,7 +462,7 @@
               <a:pPr>
                 <a:defRPr/>
               </a:pPr>
-              <a:t>‹#›</a:t>
+              <a:t>‹nº›</a:t>
             </a:fld>
             <a:endParaRPr lang="pt-BR"/>
           </a:p>
@@ -675,7 +675,7 @@
               <a:pPr>
                 <a:defRPr/>
               </a:pPr>
-              <a:t>‹#›</a:t>
+              <a:t>‹nº›</a:t>
             </a:fld>
             <a:endParaRPr lang="pt-BR"/>
           </a:p>
@@ -898,7 +898,7 @@
               <a:pPr>
                 <a:defRPr/>
               </a:pPr>
-              <a:t>‹#›</a:t>
+              <a:t>‹nº›</a:t>
             </a:fld>
             <a:endParaRPr lang="pt-BR"/>
           </a:p>
@@ -1111,7 +1111,7 @@
               <a:pPr>
                 <a:defRPr/>
               </a:pPr>
-              <a:t>‹#›</a:t>
+              <a:t>‹nº›</a:t>
             </a:fld>
             <a:endParaRPr lang="pt-BR"/>
           </a:p>
@@ -1401,7 +1401,7 @@
               <a:pPr>
                 <a:defRPr/>
               </a:pPr>
-              <a:t>‹#›</a:t>
+              <a:t>‹nº›</a:t>
             </a:fld>
             <a:endParaRPr lang="pt-BR"/>
           </a:p>
@@ -1675,7 +1675,7 @@
               <a:pPr>
                 <a:defRPr/>
               </a:pPr>
-              <a:t>‹#›</a:t>
+              <a:t>‹nº›</a:t>
             </a:fld>
             <a:endParaRPr lang="pt-BR"/>
           </a:p>
@@ -2084,7 +2084,7 @@
               <a:pPr>
                 <a:defRPr/>
               </a:pPr>
-              <a:t>‹#›</a:t>
+              <a:t>‹nº›</a:t>
             </a:fld>
             <a:endParaRPr lang="pt-BR"/>
           </a:p>
@@ -2246,7 +2246,7 @@
               <a:pPr>
                 <a:defRPr/>
               </a:pPr>
-              <a:t>‹#›</a:t>
+              <a:t>‹nº›</a:t>
             </a:fld>
             <a:endParaRPr lang="pt-BR"/>
           </a:p>
@@ -2386,7 +2386,7 @@
               <a:pPr>
                 <a:defRPr/>
               </a:pPr>
-              <a:t>‹#›</a:t>
+              <a:t>‹nº›</a:t>
             </a:fld>
             <a:endParaRPr lang="pt-BR"/>
           </a:p>
@@ -2706,7 +2706,7 @@
               <a:pPr>
                 <a:defRPr/>
               </a:pPr>
-              <a:t>‹#›</a:t>
+              <a:t>‹nº›</a:t>
             </a:fld>
             <a:endParaRPr lang="pt-BR"/>
           </a:p>
@@ -3006,7 +3006,7 @@
               <a:pPr>
                 <a:defRPr/>
               </a:pPr>
-              <a:t>‹#›</a:t>
+              <a:t>‹nº›</a:t>
             </a:fld>
             <a:endParaRPr lang="pt-BR"/>
           </a:p>
@@ -3370,7 +3370,7 @@
               <a:pPr>
                 <a:defRPr/>
               </a:pPr>
-              <a:t>‹#›</a:t>
+              <a:t>‹nº›</a:t>
             </a:fld>
             <a:endParaRPr lang="pt-BR"/>
           </a:p>
@@ -6425,17 +6425,41 @@
             </a:lvl9pPr>
           </a:lstStyle>
           <a:p>
-            <a:pPr marL="171450" indent="-171450">
-              <a:buFont typeface="Wingdings" pitchFamily="2" charset="2"/>
-              <a:buChar char="ü"/>
-            </a:pPr>
+            <a:pPr marL="285750" indent="-285750"/>
             <a:r>
               <a:rPr lang="pt-BR" sz="1400" dirty="0">
-                <a:latin typeface="Verdana" pitchFamily="34" charset="0"/>
-                <a:ea typeface="Verdana" pitchFamily="34" charset="0"/>
+                <a:latin typeface="Verdana" panose="020B0604030504040204" pitchFamily="34" charset="0"/>
+                <a:ea typeface="Verdana" panose="020B0604030504040204" pitchFamily="34" charset="0"/>
               </a:rPr>
-              <a:t>SOMENTE TÓPICOS – OBJETIVO GERAL</a:t>
-            </a:r>
+              <a:t>Identificar as principais barreiras de acessibilidade digital enfrentadas pelos idosos no uso de aplicativos móveis de serviços públicos, visando promover a inclusão digital e preservar sua autonomia.</a:t>
+            </a:r>
+          </a:p>
+          <a:p>
+            <a:pPr marL="285750" indent="-285750"/>
+            <a:r>
+              <a:rPr lang="pt-BR" sz="1400" dirty="0">
+                <a:latin typeface="Verdana" panose="020B0604030504040204" pitchFamily="34" charset="0"/>
+                <a:ea typeface="Verdana" panose="020B0604030504040204" pitchFamily="34" charset="0"/>
+              </a:rPr>
+              <a:t>Buscar soluções para a inclusão digital das pessoas de terceira idade.</a:t>
+            </a:r>
+          </a:p>
+          <a:p>
+            <a:pPr marL="285750" indent="-285750"/>
+            <a:r>
+              <a:rPr lang="pt-BR" sz="1400" dirty="0">
+                <a:latin typeface="Verdana" panose="020B0604030504040204" pitchFamily="34" charset="0"/>
+                <a:ea typeface="Verdana" panose="020B0604030504040204" pitchFamily="34" charset="0"/>
+              </a:rPr>
+              <a:t>Melhorar a usabilidade do sistema contribuindo com a inclusão.</a:t>
+            </a:r>
+          </a:p>
+          <a:p>
+            <a:pPr marL="285750" indent="-285750"/>
+            <a:endParaRPr lang="pt-BR" sz="1400" dirty="0">
+              <a:latin typeface="Verdana" pitchFamily="34" charset="0"/>
+              <a:ea typeface="Verdana" pitchFamily="34" charset="0"/>
+            </a:endParaRPr>
           </a:p>
           <a:p>
             <a:pPr marL="171450" indent="-171450">
@@ -6448,29 +6472,6 @@
             </a:endParaRPr>
           </a:p>
           <a:p>
-            <a:pPr marL="171450" indent="-171450">
-              <a:buFont typeface="Wingdings" pitchFamily="2" charset="2"/>
-              <a:buChar char="ü"/>
-            </a:pPr>
-            <a:r>
-              <a:rPr lang="pt-BR" sz="1400" dirty="0">
-                <a:latin typeface="Verdana" pitchFamily="34" charset="0"/>
-                <a:ea typeface="Verdana" pitchFamily="34" charset="0"/>
-              </a:rPr>
-              <a:t>SOMENTE TÓPICOS – OBJETIVOS ESPECÍFICOS</a:t>
-            </a:r>
-          </a:p>
-          <a:p>
-            <a:pPr marL="171450" indent="-171450">
-              <a:buFont typeface="Wingdings" pitchFamily="2" charset="2"/>
-              <a:buChar char="ü"/>
-            </a:pPr>
-            <a:endParaRPr lang="pt-BR" sz="1400" dirty="0">
-              <a:latin typeface="Verdana" pitchFamily="34" charset="0"/>
-              <a:ea typeface="Verdana" pitchFamily="34" charset="0"/>
-            </a:endParaRPr>
-          </a:p>
-          <a:p>
             <a:pPr>
               <a:buNone/>
             </a:pPr>
@@ -6478,6 +6479,18 @@
               <a:latin typeface="Verdana" pitchFamily="34" charset="0"/>
               <a:ea typeface="Verdana" pitchFamily="34" charset="0"/>
             </a:endParaRPr>
+          </a:p>
+          <a:p>
+            <a:pPr>
+              <a:buNone/>
+            </a:pPr>
+            <a:r>
+              <a:rPr lang="pt-BR" sz="1400" dirty="0">
+                <a:latin typeface="Verdana" pitchFamily="34" charset="0"/>
+                <a:ea typeface="Verdana" pitchFamily="34" charset="0"/>
+              </a:rPr>
+              <a:t> </a:t>
+            </a:r>
           </a:p>
           <a:p>
             <a:pPr marL="171450" indent="-171450">
@@ -7193,14 +7206,11 @@
             <a:r>
               <a:rPr lang="pt-BR" sz="1800" dirty="0">
                 <a:effectLst/>
-                <a:latin typeface="Segoe UI" panose="020B0502040204020203" pitchFamily="34" charset="0"/>
+                <a:latin typeface="Verdana" panose="020B0604030504040204" pitchFamily="34" charset="0"/>
+                <a:ea typeface="Verdana" panose="020B0604030504040204" pitchFamily="34" charset="0"/>
               </a:rPr>
               <a:t>É uma abordagem qualitativa, de natureza teórica, sem procedimentos práticos e baseados em referenciais teóricos. </a:t>
             </a:r>
-            <a:endParaRPr lang="pt-BR" sz="1800" dirty="0">
-              <a:effectLst/>
-              <a:latin typeface="Arial" panose="020B0604020202020204" pitchFamily="34" charset="0"/>
-            </a:endParaRPr>
           </a:p>
           <a:p>
             <a:pPr>
@@ -7747,17 +7757,22 @@
             </a:lvl9pPr>
           </a:lstStyle>
           <a:p>
-            <a:pPr marL="171450" indent="-171450">
-              <a:buFont typeface="Wingdings" pitchFamily="2" charset="2"/>
-              <a:buChar char="ü"/>
+            <a:pPr>
+              <a:buNone/>
             </a:pPr>
-            <a:r>
-              <a:rPr lang="pt-BR" sz="1400" dirty="0">
-                <a:latin typeface="Verdana" pitchFamily="34" charset="0"/>
-                <a:ea typeface="Verdana" pitchFamily="34" charset="0"/>
-              </a:rPr>
-              <a:t>SOMENTE TÓPICOS, TEMÁTICA E PESQUISADOR</a:t>
-            </a:r>
+            <a:endParaRPr lang="pt-BR" sz="1400" dirty="0">
+              <a:latin typeface="Verdana" pitchFamily="34" charset="0"/>
+              <a:ea typeface="Verdana" pitchFamily="34" charset="0"/>
+            </a:endParaRPr>
+          </a:p>
+          <a:p>
+            <a:pPr>
+              <a:buNone/>
+            </a:pPr>
+            <a:endParaRPr lang="pt-BR" sz="1400" dirty="0">
+              <a:latin typeface="Verdana" pitchFamily="34" charset="0"/>
+              <a:ea typeface="Verdana" pitchFamily="34" charset="0"/>
+            </a:endParaRPr>
           </a:p>
           <a:p>
             <a:pPr marL="171450" indent="-171450">
@@ -7769,116 +7784,93 @@
               <a:ea typeface="Verdana" pitchFamily="34" charset="0"/>
             </a:endParaRPr>
           </a:p>
-          <a:p>
-            <a:pPr marL="171450" indent="-171450">
-              <a:buFont typeface="Wingdings" pitchFamily="2" charset="2"/>
-              <a:buChar char="ü"/>
+        </p:txBody>
+      </p:sp>
+      <p:sp>
+        <p:nvSpPr>
+          <p:cNvPr id="5" name="CaixaDeTexto 4">
+            <a:extLst>
+              <a:ext uri="{FF2B5EF4-FFF2-40B4-BE49-F238E27FC236}">
+                <a16:creationId xmlns:a16="http://schemas.microsoft.com/office/drawing/2014/main" id="{590722A3-FF13-C376-2C82-516B3410B117}"/>
+              </a:ext>
+            </a:extLst>
+          </p:cNvPr>
+          <p:cNvSpPr txBox="1"/>
+          <p:nvPr/>
+        </p:nvSpPr>
+        <p:spPr>
+          <a:xfrm>
+            <a:off x="279173" y="2305614"/>
+            <a:ext cx="6585397" cy="2246769"/>
+          </a:xfrm>
+          <a:prstGeom prst="rect">
+            <a:avLst/>
+          </a:prstGeom>
+          <a:noFill/>
+        </p:spPr>
+        <p:txBody>
+          <a:bodyPr wrap="square" rtlCol="0" anchor="ctr">
+            <a:spAutoFit/>
+          </a:bodyPr>
+          <a:lstStyle/>
+          <a:p>
+            <a:pPr marL="285750" indent="-285750">
+              <a:buFont typeface="Arial" panose="020B0604020202020204" pitchFamily="34" charset="0"/>
+              <a:buChar char="•"/>
             </a:pPr>
             <a:r>
               <a:rPr lang="pt-BR" sz="1400" dirty="0">
-                <a:latin typeface="Verdana" pitchFamily="34" charset="0"/>
-                <a:ea typeface="Verdana" pitchFamily="34" charset="0"/>
+                <a:latin typeface="Verdana" panose="020B0604030504040204" pitchFamily="34" charset="0"/>
+                <a:ea typeface="Verdana" panose="020B0604030504040204" pitchFamily="34" charset="0"/>
               </a:rPr>
-              <a:t>SOMENTE TÓPICOS, TEMÁTICA E PESQUISADOR</a:t>
-            </a:r>
-          </a:p>
-          <a:p>
-            <a:pPr marL="171450" indent="-171450">
-              <a:buFont typeface="Wingdings" pitchFamily="2" charset="2"/>
-              <a:buChar char="ü"/>
+              <a:t>Os aplicativos precisam ser fáceis de usar, com letras maiores, botões visíveis e opções simples para facilitar o acesso dos idosos.</a:t>
+            </a:r>
+          </a:p>
+          <a:p>
+            <a:pPr marL="285750" indent="-285750">
+              <a:buFont typeface="Arial" panose="020B0604020202020204" pitchFamily="34" charset="0"/>
+              <a:buChar char="•"/>
             </a:pPr>
             <a:endParaRPr lang="pt-BR" sz="1400" dirty="0">
-              <a:latin typeface="Verdana" pitchFamily="34" charset="0"/>
-              <a:ea typeface="Verdana" pitchFamily="34" charset="0"/>
+              <a:latin typeface="Verdana" panose="020B0604030504040204" pitchFamily="34" charset="0"/>
+              <a:ea typeface="Verdana" panose="020B0604030504040204" pitchFamily="34" charset="0"/>
             </a:endParaRPr>
           </a:p>
           <a:p>
-            <a:pPr marL="171450" indent="-171450">
-              <a:buFont typeface="Wingdings" pitchFamily="2" charset="2"/>
-              <a:buChar char="ü"/>
+            <a:pPr marL="285750" indent="-285750">
+              <a:buFont typeface="Arial" panose="020B0604020202020204" pitchFamily="34" charset="0"/>
+              <a:buChar char="•"/>
             </a:pPr>
             <a:r>
               <a:rPr lang="pt-BR" sz="1400" dirty="0">
-                <a:latin typeface="Verdana" pitchFamily="34" charset="0"/>
-                <a:ea typeface="Verdana" pitchFamily="34" charset="0"/>
+                <a:latin typeface="Verdana" panose="020B0604030504040204" pitchFamily="34" charset="0"/>
+                <a:ea typeface="Verdana" panose="020B0604030504040204" pitchFamily="34" charset="0"/>
               </a:rPr>
-              <a:t>SOMENTE TÓPICOS, TEMÁTICA E PESQUISADOR</a:t>
-            </a:r>
-          </a:p>
-          <a:p>
-            <a:pPr marL="171450" indent="-171450">
-              <a:buFont typeface="Wingdings" pitchFamily="2" charset="2"/>
-              <a:buChar char="ü"/>
+              <a:t>Muitos idosos têm dificuldades para acompanhar as mudanças tecnológicas, principalmente quando os aplicativos são complicados ou não levam em conta suas necessidades.</a:t>
+            </a:r>
+          </a:p>
+          <a:p>
+            <a:pPr marL="285750" indent="-285750">
+              <a:buFont typeface="Arial" panose="020B0604020202020204" pitchFamily="34" charset="0"/>
+              <a:buChar char="•"/>
             </a:pPr>
             <a:endParaRPr lang="pt-BR" sz="1400" dirty="0">
-              <a:latin typeface="Verdana" pitchFamily="34" charset="0"/>
-              <a:ea typeface="Verdana" pitchFamily="34" charset="0"/>
+              <a:latin typeface="Verdana" panose="020B0604030504040204" pitchFamily="34" charset="0"/>
+              <a:ea typeface="Verdana" panose="020B0604030504040204" pitchFamily="34" charset="0"/>
             </a:endParaRPr>
           </a:p>
           <a:p>
-            <a:pPr marL="171450" indent="-171450">
-              <a:buFont typeface="Wingdings" pitchFamily="2" charset="2"/>
-              <a:buChar char="ü"/>
+            <a:pPr marL="285750" indent="-285750">
+              <a:buFont typeface="Arial" panose="020B0604020202020204" pitchFamily="34" charset="0"/>
+              <a:buChar char="•"/>
             </a:pPr>
             <a:r>
               <a:rPr lang="pt-BR" sz="1400" dirty="0">
-                <a:latin typeface="Verdana" pitchFamily="34" charset="0"/>
-                <a:ea typeface="Verdana" pitchFamily="34" charset="0"/>
+                <a:latin typeface="Verdana" panose="020B0604030504040204" pitchFamily="34" charset="0"/>
+                <a:ea typeface="Verdana" panose="020B0604030504040204" pitchFamily="34" charset="0"/>
               </a:rPr>
-              <a:t>SOMENTE TÓPICOS, TEMÁTICA E PESQUISADOR</a:t>
-            </a:r>
-          </a:p>
-          <a:p>
-            <a:pPr marL="171450" indent="-171450">
-              <a:buFont typeface="Wingdings" pitchFamily="2" charset="2"/>
-              <a:buChar char="ü"/>
-            </a:pPr>
-            <a:endParaRPr lang="pt-BR" sz="1400" dirty="0">
-              <a:latin typeface="Verdana" pitchFamily="34" charset="0"/>
-              <a:ea typeface="Verdana" pitchFamily="34" charset="0"/>
-            </a:endParaRPr>
-          </a:p>
-          <a:p>
-            <a:pPr marL="171450" indent="-171450">
-              <a:buFont typeface="Wingdings" pitchFamily="2" charset="2"/>
-              <a:buChar char="ü"/>
-            </a:pPr>
-            <a:r>
-              <a:rPr lang="pt-BR" sz="1400" dirty="0">
-                <a:latin typeface="Verdana" pitchFamily="34" charset="0"/>
-                <a:ea typeface="Verdana" pitchFamily="34" charset="0"/>
-              </a:rPr>
-              <a:t>SOMENTE TÓPICOS, TEMÁTICA E PESQUISADOR</a:t>
-            </a:r>
-          </a:p>
-          <a:p>
-            <a:pPr marL="171450" indent="-171450">
-              <a:buFont typeface="Wingdings" pitchFamily="2" charset="2"/>
-              <a:buChar char="ü"/>
-            </a:pPr>
-            <a:endParaRPr lang="pt-BR" sz="1400" dirty="0">
-              <a:latin typeface="Verdana" pitchFamily="34" charset="0"/>
-              <a:ea typeface="Verdana" pitchFamily="34" charset="0"/>
-            </a:endParaRPr>
-          </a:p>
-          <a:p>
-            <a:pPr>
-              <a:buNone/>
-            </a:pPr>
-            <a:endParaRPr lang="pt-BR" sz="1400" dirty="0">
-              <a:latin typeface="Verdana" pitchFamily="34" charset="0"/>
-              <a:ea typeface="Verdana" pitchFamily="34" charset="0"/>
-            </a:endParaRPr>
-          </a:p>
-          <a:p>
-            <a:pPr marL="171450" indent="-171450">
-              <a:buFont typeface="Wingdings" pitchFamily="2" charset="2"/>
-              <a:buChar char="ü"/>
-            </a:pPr>
-            <a:endParaRPr lang="pt-BR" sz="1400" dirty="0">
-              <a:latin typeface="Verdana" pitchFamily="34" charset="0"/>
-              <a:ea typeface="Verdana" pitchFamily="34" charset="0"/>
-            </a:endParaRPr>
+              <a:t>É importante ajudar os idosos a aprender a usar a tecnologia para que consigam acessar informações e serviços sem depender tanto de outras pessoas.</a:t>
+            </a:r>
           </a:p>
         </p:txBody>
       </p:sp>
@@ -8406,137 +8398,40 @@
             </a:lvl9pPr>
           </a:lstStyle>
           <a:p>
-            <a:pPr marL="171450" indent="-171450">
-              <a:buFont typeface="Wingdings" pitchFamily="2" charset="2"/>
-              <a:buChar char="ü"/>
-            </a:pPr>
+            <a:pPr marL="285750" indent="-285750"/>
             <a:r>
               <a:rPr lang="pt-BR" sz="1400" dirty="0">
-                <a:latin typeface="Verdana" pitchFamily="34" charset="0"/>
-                <a:ea typeface="Verdana" pitchFamily="34" charset="0"/>
+                <a:latin typeface="Verdana" panose="020B0604030504040204" pitchFamily="34" charset="0"/>
+                <a:ea typeface="Verdana" panose="020B0604030504040204" pitchFamily="34" charset="0"/>
               </a:rPr>
-              <a:t>SOMENTE TÓPICOS, TEMÁTICA E PESQUISADOR</a:t>
-            </a:r>
-          </a:p>
-          <a:p>
-            <a:pPr marL="171450" indent="-171450">
-              <a:buFont typeface="Wingdings" pitchFamily="2" charset="2"/>
-              <a:buChar char="ü"/>
-            </a:pPr>
-            <a:endParaRPr lang="pt-BR" sz="1400" dirty="0">
+              <a:t>Os aplicativos devem ter uma organização simples, com instruções claras e funções fáceis de encontrar, evitando que o usuário fique confuso durante o uso.</a:t>
+            </a:r>
+            <a:endParaRPr lang="pt-BR" sz="2000" dirty="0">
               <a:latin typeface="Verdana" pitchFamily="34" charset="0"/>
               <a:ea typeface="Verdana" pitchFamily="34" charset="0"/>
             </a:endParaRPr>
           </a:p>
           <a:p>
-            <a:pPr marL="171450" indent="-171450">
-              <a:buFont typeface="Wingdings" pitchFamily="2" charset="2"/>
-              <a:buChar char="ü"/>
+            <a:pPr>
+              <a:buNone/>
             </a:pPr>
-            <a:r>
-              <a:rPr lang="pt-BR" sz="1400" dirty="0">
-                <a:latin typeface="Verdana" pitchFamily="34" charset="0"/>
-                <a:ea typeface="Verdana" pitchFamily="34" charset="0"/>
-              </a:rPr>
-              <a:t>SOMENTE TÓPICOS, TEMÁTICA E PESQUISADOR</a:t>
-            </a:r>
-          </a:p>
-          <a:p>
-            <a:pPr marL="171450" indent="-171450">
-              <a:buFont typeface="Wingdings" pitchFamily="2" charset="2"/>
-              <a:buChar char="ü"/>
-            </a:pPr>
-            <a:endParaRPr lang="pt-BR" sz="1400" dirty="0">
+            <a:endParaRPr lang="pt-BR" sz="2000" dirty="0">
               <a:latin typeface="Verdana" pitchFamily="34" charset="0"/>
               <a:ea typeface="Verdana" pitchFamily="34" charset="0"/>
             </a:endParaRPr>
           </a:p>
           <a:p>
-            <a:pPr marL="171450" indent="-171450">
-              <a:buFont typeface="Wingdings" pitchFamily="2" charset="2"/>
-              <a:buChar char="ü"/>
-            </a:pPr>
+            <a:pPr marL="285750" indent="-285750"/>
             <a:r>
               <a:rPr lang="pt-BR" sz="1400" dirty="0">
-                <a:latin typeface="Verdana" pitchFamily="34" charset="0"/>
-                <a:ea typeface="Verdana" pitchFamily="34" charset="0"/>
+                <a:latin typeface="Verdana" panose="020B0604030504040204" pitchFamily="34" charset="0"/>
+                <a:ea typeface="Verdana" panose="020B0604030504040204" pitchFamily="34" charset="0"/>
               </a:rPr>
-              <a:t>SOMENTE TÓPICOS, TEMÁTICA E PESQUISADOR</a:t>
-            </a:r>
-          </a:p>
-          <a:p>
-            <a:pPr marL="171450" indent="-171450">
-              <a:buFont typeface="Wingdings" pitchFamily="2" charset="2"/>
-              <a:buChar char="ü"/>
-            </a:pPr>
-            <a:endParaRPr lang="pt-BR" sz="1400" dirty="0">
-              <a:latin typeface="Verdana" pitchFamily="34" charset="0"/>
-              <a:ea typeface="Verdana" pitchFamily="34" charset="0"/>
-            </a:endParaRPr>
-          </a:p>
-          <a:p>
-            <a:pPr marL="171450" indent="-171450">
-              <a:buFont typeface="Wingdings" pitchFamily="2" charset="2"/>
-              <a:buChar char="ü"/>
-            </a:pPr>
-            <a:r>
-              <a:rPr lang="pt-BR" sz="1400" dirty="0">
-                <a:latin typeface="Verdana" pitchFamily="34" charset="0"/>
-                <a:ea typeface="Verdana" pitchFamily="34" charset="0"/>
-              </a:rPr>
-              <a:t>SOMENTE TÓPICOS, TEMÁTICA E PESQUISADOR</a:t>
-            </a:r>
-          </a:p>
-          <a:p>
-            <a:pPr marL="171450" indent="-171450">
-              <a:buFont typeface="Wingdings" pitchFamily="2" charset="2"/>
-              <a:buChar char="ü"/>
-            </a:pPr>
-            <a:endParaRPr lang="pt-BR" sz="1400" dirty="0">
-              <a:latin typeface="Verdana" pitchFamily="34" charset="0"/>
-              <a:ea typeface="Verdana" pitchFamily="34" charset="0"/>
-            </a:endParaRPr>
-          </a:p>
-          <a:p>
-            <a:pPr marL="171450" indent="-171450">
-              <a:buFont typeface="Wingdings" pitchFamily="2" charset="2"/>
-              <a:buChar char="ü"/>
-            </a:pPr>
-            <a:r>
-              <a:rPr lang="pt-BR" sz="1400" dirty="0">
-                <a:latin typeface="Verdana" pitchFamily="34" charset="0"/>
-                <a:ea typeface="Verdana" pitchFamily="34" charset="0"/>
-              </a:rPr>
-              <a:t>SOMENTE TÓPICOS, TEMÁTICA E PESQUISADOR</a:t>
-            </a:r>
-          </a:p>
-          <a:p>
-            <a:pPr marL="171450" indent="-171450">
-              <a:buFont typeface="Wingdings" pitchFamily="2" charset="2"/>
-              <a:buChar char="ü"/>
-            </a:pPr>
-            <a:endParaRPr lang="pt-BR" sz="1400" dirty="0">
-              <a:latin typeface="Verdana" pitchFamily="34" charset="0"/>
-              <a:ea typeface="Verdana" pitchFamily="34" charset="0"/>
-            </a:endParaRPr>
-          </a:p>
-          <a:p>
-            <a:pPr>
-              <a:buNone/>
-            </a:pPr>
-            <a:endParaRPr lang="pt-BR" sz="1400" dirty="0">
-              <a:latin typeface="Verdana" pitchFamily="34" charset="0"/>
-              <a:ea typeface="Verdana" pitchFamily="34" charset="0"/>
-            </a:endParaRPr>
-          </a:p>
-          <a:p>
-            <a:pPr marL="171450" indent="-171450">
-              <a:buFont typeface="Wingdings" pitchFamily="2" charset="2"/>
-              <a:buChar char="ü"/>
-            </a:pPr>
-            <a:endParaRPr lang="pt-BR" sz="1400" dirty="0">
-              <a:latin typeface="Verdana" pitchFamily="34" charset="0"/>
-              <a:ea typeface="Verdana" pitchFamily="34" charset="0"/>
+              <a:t>Cada vez mais serviços públicos estão disponíveis pela internet, mas nem todos os idosos conseguem utilizá-los com facilidade. É importante que esses serviços sejam acessíveis a todos.</a:t>
+            </a:r>
+            <a:endParaRPr lang="pt-BR" sz="2000" dirty="0">
+              <a:latin typeface="Verdana" panose="020B0604030504040204" pitchFamily="34" charset="0"/>
+              <a:ea typeface="Verdana" panose="020B0604030504040204" pitchFamily="34" charset="0"/>
             </a:endParaRPr>
           </a:p>
         </p:txBody>
@@ -9065,115 +8960,49 @@
             </a:lvl9pPr>
           </a:lstStyle>
           <a:p>
-            <a:pPr marL="171450" indent="-171450">
-              <a:buFont typeface="Wingdings" pitchFamily="2" charset="2"/>
-              <a:buChar char="ü"/>
-            </a:pPr>
+            <a:pPr marL="285750" indent="-285750"/>
             <a:r>
               <a:rPr lang="pt-BR" sz="1400" dirty="0">
-                <a:latin typeface="Verdana" pitchFamily="34" charset="0"/>
-                <a:ea typeface="Verdana" pitchFamily="34" charset="0"/>
+                <a:latin typeface="Verdana" panose="020B0604030504040204" pitchFamily="34" charset="0"/>
+                <a:ea typeface="Verdana" panose="020B0604030504040204" pitchFamily="34" charset="0"/>
               </a:rPr>
-              <a:t>SOMENTE TÓPICOS</a:t>
-            </a:r>
-          </a:p>
-          <a:p>
-            <a:pPr marL="171450" indent="-171450">
-              <a:buFont typeface="Wingdings" pitchFamily="2" charset="2"/>
-              <a:buChar char="ü"/>
-            </a:pPr>
+              <a:t>As dificuldades dos idosos vêm tanto de aplicativos mal adaptados quanto de órgãos públicos que não seguem as próprias regras de acessibilidade.</a:t>
+            </a:r>
+          </a:p>
+          <a:p>
+            <a:pPr marL="285750" indent="-285750"/>
             <a:endParaRPr lang="pt-BR" sz="1400" dirty="0">
-              <a:latin typeface="Verdana" pitchFamily="34" charset="0"/>
-              <a:ea typeface="Verdana" pitchFamily="34" charset="0"/>
+              <a:latin typeface="Verdana" panose="020B0604030504040204" pitchFamily="34" charset="0"/>
+              <a:ea typeface="Verdana" panose="020B0604030504040204" pitchFamily="34" charset="0"/>
             </a:endParaRPr>
           </a:p>
           <a:p>
-            <a:pPr marL="171450" indent="-171450">
-              <a:buFont typeface="Wingdings" pitchFamily="2" charset="2"/>
-              <a:buChar char="ü"/>
-            </a:pPr>
+            <a:pPr marL="285750" indent="-285750"/>
             <a:r>
               <a:rPr lang="pt-BR" sz="1400" dirty="0">
-                <a:latin typeface="Verdana" pitchFamily="34" charset="0"/>
-                <a:ea typeface="Verdana" pitchFamily="34" charset="0"/>
+                <a:latin typeface="Verdana" panose="020B0604030504040204" pitchFamily="34" charset="0"/>
+                <a:ea typeface="Verdana" panose="020B0604030504040204" pitchFamily="34" charset="0"/>
               </a:rPr>
-              <a:t>SOMENTE TÓPICOS</a:t>
-            </a:r>
-          </a:p>
-          <a:p>
-            <a:pPr marL="171450" indent="-171450">
-              <a:buFont typeface="Wingdings" pitchFamily="2" charset="2"/>
-              <a:buChar char="ü"/>
-            </a:pPr>
+              <a:t>Sem acessibilidade, o idoso perde autonomia. Todos os artigos concordam que isso faz com que ele dependa de terceiros.</a:t>
+            </a:r>
+          </a:p>
+          <a:p>
+            <a:pPr marL="285750" indent="-285750"/>
             <a:endParaRPr lang="pt-BR" sz="1400" dirty="0">
-              <a:latin typeface="Verdana" pitchFamily="34" charset="0"/>
-              <a:ea typeface="Verdana" pitchFamily="34" charset="0"/>
+              <a:latin typeface="Verdana" panose="020B0604030504040204" pitchFamily="34" charset="0"/>
+              <a:ea typeface="Verdana" panose="020B0604030504040204" pitchFamily="34" charset="0"/>
             </a:endParaRPr>
           </a:p>
           <a:p>
-            <a:pPr marL="171450" indent="-171450">
-              <a:buFont typeface="Wingdings" pitchFamily="2" charset="2"/>
-              <a:buChar char="ü"/>
-            </a:pPr>
+            <a:pPr marL="285750" indent="-285750"/>
             <a:r>
               <a:rPr lang="pt-BR" sz="1400" dirty="0">
-                <a:latin typeface="Verdana" pitchFamily="34" charset="0"/>
-                <a:ea typeface="Verdana" pitchFamily="34" charset="0"/>
+                <a:latin typeface="Verdana" panose="020B0604030504040204" pitchFamily="34" charset="0"/>
+                <a:ea typeface="Verdana" panose="020B0604030504040204" pitchFamily="34" charset="0"/>
               </a:rPr>
-              <a:t>SOMENTE TÓPICOS</a:t>
-            </a:r>
-          </a:p>
-          <a:p>
-            <a:pPr marL="171450" indent="-171450">
-              <a:buFont typeface="Wingdings" pitchFamily="2" charset="2"/>
-              <a:buChar char="ü"/>
-            </a:pPr>
-            <a:endParaRPr lang="pt-BR" sz="1400" dirty="0">
-              <a:latin typeface="Verdana" pitchFamily="34" charset="0"/>
-              <a:ea typeface="Verdana" pitchFamily="34" charset="0"/>
-            </a:endParaRPr>
-          </a:p>
-          <a:p>
-            <a:pPr marL="171450" indent="-171450">
-              <a:buFont typeface="Wingdings" pitchFamily="2" charset="2"/>
-              <a:buChar char="ü"/>
-            </a:pPr>
-            <a:r>
-              <a:rPr lang="pt-BR" sz="1400" dirty="0">
-                <a:latin typeface="Verdana" pitchFamily="34" charset="0"/>
-                <a:ea typeface="Verdana" pitchFamily="34" charset="0"/>
-              </a:rPr>
-              <a:t>SOMENTE TÓPICOS</a:t>
-            </a:r>
-          </a:p>
-          <a:p>
-            <a:pPr marL="171450" indent="-171450">
-              <a:buFont typeface="Wingdings" pitchFamily="2" charset="2"/>
-              <a:buChar char="ü"/>
-            </a:pPr>
-            <a:endParaRPr lang="pt-BR" sz="1400" dirty="0">
-              <a:latin typeface="Verdana" pitchFamily="34" charset="0"/>
-              <a:ea typeface="Verdana" pitchFamily="34" charset="0"/>
-            </a:endParaRPr>
-          </a:p>
-          <a:p>
-            <a:pPr marL="171450" indent="-171450">
-              <a:buFont typeface="Wingdings" pitchFamily="2" charset="2"/>
-              <a:buChar char="ü"/>
-            </a:pPr>
-            <a:r>
-              <a:rPr lang="pt-BR" sz="1400" dirty="0">
-                <a:latin typeface="Verdana" pitchFamily="34" charset="0"/>
-                <a:ea typeface="Verdana" pitchFamily="34" charset="0"/>
-              </a:rPr>
-              <a:t>SOMENTE TÓPICOS</a:t>
-            </a:r>
-          </a:p>
-          <a:p>
-            <a:pPr>
-              <a:buNone/>
-            </a:pPr>
-            <a:endParaRPr lang="pt-BR" sz="1400" dirty="0">
+              <a:t>Limitação da pesquisa. O estudo foi apenas teórico, com 3 artigos. Futuros trabalhos devem fazer testes práticos com os idosos.</a:t>
+            </a:r>
+            <a:endParaRPr lang="pt-BR" sz="2000" dirty="0">
               <a:latin typeface="Verdana" pitchFamily="34" charset="0"/>
               <a:ea typeface="Verdana" pitchFamily="34" charset="0"/>
             </a:endParaRPr>
@@ -10079,6 +9908,15 @@
 </file>
 
 <file path=customXml/item1.xml><?xml version="1.0" encoding="utf-8"?>
+<?mso-contentType ?>
+<FormTemplates xmlns="http://schemas.microsoft.com/sharepoint/v3/contenttype/forms">
+  <Display>DocumentLibraryForm</Display>
+  <Edit>DocumentLibraryForm</Edit>
+  <New>DocumentLibraryForm</New>
+</FormTemplates>
+</file>
+
+<file path=customXml/item2.xml><?xml version="1.0" encoding="utf-8"?>
 <ct:contentTypeSchema xmlns:ct="http://schemas.microsoft.com/office/2006/metadata/contentType" xmlns:ma="http://schemas.microsoft.com/office/2006/metadata/properties/metaAttributes" ct:_="" ma:_="" ma:contentTypeName="Documento" ma:contentTypeID="0x0101001DAED1B117F6894D909B25A69A4597D2" ma:contentTypeVersion="11" ma:contentTypeDescription="Crie um novo documento." ma:contentTypeScope="" ma:versionID="fc0e1081098a96f1fc26b259e7bbb1c8">
   <xsd:schema xmlns:xsd="http://www.w3.org/2001/XMLSchema" xmlns:xs="http://www.w3.org/2001/XMLSchema" xmlns:p="http://schemas.microsoft.com/office/2006/metadata/properties" xmlns:ns2="0cd93fe2-0880-41f5-aab4-f958682b72cb" xmlns:ns3="18000554-2c77-4cf4-9366-a485aa9d7e35" targetNamespace="http://schemas.microsoft.com/office/2006/metadata/properties" ma:root="true" ma:fieldsID="f39cd65ee00b5e4c5dd2756fb7575f2f" ns2:_="" ns3:_="">
     <xsd:import namespace="0cd93fe2-0880-41f5-aab4-f958682b72cb"/>
@@ -10289,16 +10127,15 @@
 </ct:contentTypeSchema>
 </file>
 
-<file path=customXml/item2.xml><?xml version="1.0" encoding="utf-8"?>
-<?mso-contentType ?>
-<FormTemplates xmlns="http://schemas.microsoft.com/sharepoint/v3/contenttype/forms">
-  <Display>DocumentLibraryForm</Display>
-  <Edit>DocumentLibraryForm</Edit>
-  <New>DocumentLibraryForm</New>
-</FormTemplates>
+<file path=customXml/itemProps1.xml><?xml version="1.0" encoding="utf-8"?>
+<ds:datastoreItem xmlns:ds="http://schemas.openxmlformats.org/officeDocument/2006/customXml" ds:itemID="{A4661556-5590-415F-9315-F9BACBDA7B81}">
+  <ds:schemaRefs>
+    <ds:schemaRef ds:uri="http://schemas.microsoft.com/sharepoint/v3/contenttype/forms"/>
+  </ds:schemaRefs>
+</ds:datastoreItem>
 </file>
 
-<file path=customXml/itemProps1.xml><?xml version="1.0" encoding="utf-8"?>
+<file path=customXml/itemProps2.xml><?xml version="1.0" encoding="utf-8"?>
 <ds:datastoreItem xmlns:ds="http://schemas.openxmlformats.org/officeDocument/2006/customXml" ds:itemID="{CEB3752F-42B6-452F-9AAE-531B32224585}">
   <ds:schemaRefs>
     <ds:schemaRef ds:uri="http://schemas.microsoft.com/office/2006/metadata/contentType"/>
@@ -10315,12 +10152,4 @@
     <ds:schemaRef ds:uri="http://schemas.microsoft.com/internal/obd"/>
   </ds:schemaRefs>
 </ds:datastoreItem>
-</file>
-
-<file path=customXml/itemProps2.xml><?xml version="1.0" encoding="utf-8"?>
-<ds:datastoreItem xmlns:ds="http://schemas.openxmlformats.org/officeDocument/2006/customXml" ds:itemID="{A4661556-5590-415F-9315-F9BACBDA7B81}">
-  <ds:schemaRefs>
-    <ds:schemaRef ds:uri="http://schemas.microsoft.com/sharepoint/v3/contenttype/forms"/>
-  </ds:schemaRefs>
-</ds:datastoreItem>
 </file>
--- a/Apresentação.pptx
+++ b/Apresentação.pptx
@@ -462,7 +462,7 @@
               <a:pPr>
                 <a:defRPr/>
               </a:pPr>
-              <a:t>‹nº›</a:t>
+              <a:t>‹#›</a:t>
             </a:fld>
             <a:endParaRPr lang="pt-BR"/>
           </a:p>
@@ -675,7 +675,7 @@
               <a:pPr>
                 <a:defRPr/>
               </a:pPr>
-              <a:t>‹nº›</a:t>
+              <a:t>‹#›</a:t>
             </a:fld>
             <a:endParaRPr lang="pt-BR"/>
           </a:p>
@@ -898,7 +898,7 @@
               <a:pPr>
                 <a:defRPr/>
               </a:pPr>
-              <a:t>‹nº›</a:t>
+              <a:t>‹#›</a:t>
             </a:fld>
             <a:endParaRPr lang="pt-BR"/>
           </a:p>
@@ -1111,7 +1111,7 @@
               <a:pPr>
                 <a:defRPr/>
               </a:pPr>
-              <a:t>‹nº›</a:t>
+              <a:t>‹#›</a:t>
             </a:fld>
             <a:endParaRPr lang="pt-BR"/>
           </a:p>
@@ -1401,7 +1401,7 @@
               <a:pPr>
                 <a:defRPr/>
               </a:pPr>
-              <a:t>‹nº›</a:t>
+              <a:t>‹#›</a:t>
             </a:fld>
             <a:endParaRPr lang="pt-BR"/>
           </a:p>
@@ -1675,7 +1675,7 @@
               <a:pPr>
                 <a:defRPr/>
               </a:pPr>
-              <a:t>‹nº›</a:t>
+              <a:t>‹#›</a:t>
             </a:fld>
             <a:endParaRPr lang="pt-BR"/>
           </a:p>
@@ -2084,7 +2084,7 @@
               <a:pPr>
                 <a:defRPr/>
               </a:pPr>
-              <a:t>‹nº›</a:t>
+              <a:t>‹#›</a:t>
             </a:fld>
             <a:endParaRPr lang="pt-BR"/>
           </a:p>
@@ -2246,7 +2246,7 @@
               <a:pPr>
                 <a:defRPr/>
               </a:pPr>
-              <a:t>‹nº›</a:t>
+              <a:t>‹#›</a:t>
             </a:fld>
             <a:endParaRPr lang="pt-BR"/>
           </a:p>
@@ -2386,7 +2386,7 @@
               <a:pPr>
                 <a:defRPr/>
               </a:pPr>
-              <a:t>‹nº›</a:t>
+              <a:t>‹#›</a:t>
             </a:fld>
             <a:endParaRPr lang="pt-BR"/>
           </a:p>
@@ -2706,7 +2706,7 @@
               <a:pPr>
                 <a:defRPr/>
               </a:pPr>
-              <a:t>‹nº›</a:t>
+              <a:t>‹#›</a:t>
             </a:fld>
             <a:endParaRPr lang="pt-BR"/>
           </a:p>
@@ -3006,7 +3006,7 @@
               <a:pPr>
                 <a:defRPr/>
               </a:pPr>
-              <a:t>‹nº›</a:t>
+              <a:t>‹#›</a:t>
             </a:fld>
             <a:endParaRPr lang="pt-BR"/>
           </a:p>
@@ -3370,7 +3370,7 @@
               <a:pPr>
                 <a:defRPr/>
               </a:pPr>
-              <a:t>‹nº›</a:t>
+              <a:t>‹#›</a:t>
             </a:fld>
             <a:endParaRPr lang="pt-BR"/>
           </a:p>
@@ -4117,8 +4117,8 @@
         </p:nvSpPr>
         <p:spPr bwMode="auto">
           <a:xfrm>
-            <a:off x="2743200" y="2471738"/>
-            <a:ext cx="6705600" cy="1569660"/>
+            <a:off x="2743200" y="1324425"/>
+            <a:ext cx="6705600" cy="3970318"/>
           </a:xfrm>
           <a:prstGeom prst="rect">
             <a:avLst/>
@@ -4256,7 +4256,7 @@
               </a:spcBef>
             </a:pPr>
             <a:r>
-              <a:rPr lang="en-US" altLang="pt-BR" sz="3200" i="1" dirty="0">
+              <a:rPr lang="en-US" altLang="pt-BR" sz="2800" i="1" dirty="0">
                 <a:solidFill>
                   <a:schemeClr val="bg1"/>
                 </a:solidFill>
@@ -4265,141 +4265,616 @@
               <a:t>“</a:t>
             </a:r>
             <a:r>
-              <a:rPr lang="en-US" altLang="pt-BR" sz="3200" i="1" dirty="0" err="1">
+              <a:rPr lang="en-US" sz="2800" i="1" dirty="0">
                 <a:solidFill>
                   <a:schemeClr val="bg1"/>
                 </a:solidFill>
                 <a:latin typeface="Verdana" panose="020B0604030504040204" pitchFamily="34" charset="0"/>
-              </a:rPr>
-              <a:t>Texto</a:t>
-            </a:r>
-            <a:r>
-              <a:rPr lang="en-US" altLang="pt-BR" sz="3200" i="1" dirty="0">
+                <a:ea typeface="Verdana" panose="020B0604030504040204" pitchFamily="34" charset="0"/>
+              </a:rPr>
+              <a:t>A </a:t>
+            </a:r>
+            <a:r>
+              <a:rPr lang="en-US" sz="2800" i="1" dirty="0" err="1">
                 <a:solidFill>
                   <a:schemeClr val="bg1"/>
                 </a:solidFill>
                 <a:latin typeface="Verdana" panose="020B0604030504040204" pitchFamily="34" charset="0"/>
+                <a:ea typeface="Verdana" panose="020B0604030504040204" pitchFamily="34" charset="0"/>
+              </a:rPr>
+              <a:t>tecnologia</a:t>
+            </a:r>
+            <a:r>
+              <a:rPr lang="en-US" sz="2800" i="1" dirty="0">
+                <a:solidFill>
+                  <a:schemeClr val="bg1"/>
+                </a:solidFill>
+                <a:latin typeface="Verdana" panose="020B0604030504040204" pitchFamily="34" charset="0"/>
+                <a:ea typeface="Verdana" panose="020B0604030504040204" pitchFamily="34" charset="0"/>
               </a:rPr>
               <a:t> </a:t>
             </a:r>
             <a:r>
-              <a:rPr lang="en-US" altLang="pt-BR" sz="3200" i="1" dirty="0" err="1">
+              <a:rPr lang="en-US" sz="2800" i="1" dirty="0" err="1">
                 <a:solidFill>
                   <a:schemeClr val="bg1"/>
                 </a:solidFill>
                 <a:latin typeface="Verdana" panose="020B0604030504040204" pitchFamily="34" charset="0"/>
-              </a:rPr>
-              <a:t>ou</a:t>
-            </a:r>
-            <a:r>
-              <a:rPr lang="en-US" altLang="pt-BR" sz="3200" i="1" dirty="0">
+                <a:ea typeface="Verdana" panose="020B0604030504040204" pitchFamily="34" charset="0"/>
+              </a:rPr>
+              <a:t>não</a:t>
+            </a:r>
+            <a:r>
+              <a:rPr lang="en-US" sz="2800" i="1" dirty="0">
                 <a:solidFill>
                   <a:schemeClr val="bg1"/>
                 </a:solidFill>
                 <a:latin typeface="Verdana" panose="020B0604030504040204" pitchFamily="34" charset="0"/>
+                <a:ea typeface="Verdana" panose="020B0604030504040204" pitchFamily="34" charset="0"/>
               </a:rPr>
               <a:t> </a:t>
             </a:r>
             <a:r>
-              <a:rPr lang="en-US" altLang="pt-BR" sz="3200" i="1" dirty="0" err="1">
+              <a:rPr lang="en-US" sz="2800" i="1" dirty="0" err="1">
                 <a:solidFill>
                   <a:schemeClr val="bg1"/>
                 </a:solidFill>
                 <a:latin typeface="Verdana" panose="020B0604030504040204" pitchFamily="34" charset="0"/>
-              </a:rPr>
-              <a:t>citação</a:t>
-            </a:r>
-            <a:r>
-              <a:rPr lang="en-US" altLang="pt-BR" sz="3200" i="1" dirty="0">
+                <a:ea typeface="Verdana" panose="020B0604030504040204" pitchFamily="34" charset="0"/>
+              </a:rPr>
+              <a:t>exclui</a:t>
+            </a:r>
+            <a:r>
+              <a:rPr lang="en-US" sz="2800" i="1" dirty="0">
                 <a:solidFill>
                   <a:schemeClr val="bg1"/>
                 </a:solidFill>
                 <a:latin typeface="Verdana" panose="020B0604030504040204" pitchFamily="34" charset="0"/>
+                <a:ea typeface="Verdana" panose="020B0604030504040204" pitchFamily="34" charset="0"/>
+              </a:rPr>
+              <a:t> </a:t>
+            </a:r>
+            <a:r>
+              <a:rPr lang="en-US" sz="2800" i="1" dirty="0" err="1">
+                <a:solidFill>
+                  <a:schemeClr val="bg1"/>
+                </a:solidFill>
+                <a:latin typeface="Verdana" panose="020B0604030504040204" pitchFamily="34" charset="0"/>
+                <a:ea typeface="Verdana" panose="020B0604030504040204" pitchFamily="34" charset="0"/>
+              </a:rPr>
+              <a:t>por</a:t>
+            </a:r>
+            <a:r>
+              <a:rPr lang="en-US" sz="2800" i="1" dirty="0">
+                <a:solidFill>
+                  <a:schemeClr val="bg1"/>
+                </a:solidFill>
+                <a:latin typeface="Verdana" panose="020B0604030504040204" pitchFamily="34" charset="0"/>
+                <a:ea typeface="Verdana" panose="020B0604030504040204" pitchFamily="34" charset="0"/>
+              </a:rPr>
+              <a:t> </a:t>
+            </a:r>
+            <a:r>
+              <a:rPr lang="en-US" sz="2800" i="1" dirty="0" err="1">
+                <a:solidFill>
+                  <a:schemeClr val="bg1"/>
+                </a:solidFill>
+                <a:latin typeface="Verdana" panose="020B0604030504040204" pitchFamily="34" charset="0"/>
+                <a:ea typeface="Verdana" panose="020B0604030504040204" pitchFamily="34" charset="0"/>
+              </a:rPr>
+              <a:t>si</a:t>
+            </a:r>
+            <a:r>
+              <a:rPr lang="en-US" sz="2800" i="1" dirty="0">
+                <a:solidFill>
+                  <a:schemeClr val="bg1"/>
+                </a:solidFill>
+                <a:latin typeface="Verdana" panose="020B0604030504040204" pitchFamily="34" charset="0"/>
+                <a:ea typeface="Verdana" panose="020B0604030504040204" pitchFamily="34" charset="0"/>
+              </a:rPr>
+              <a:t> </a:t>
+            </a:r>
+            <a:r>
+              <a:rPr lang="en-US" sz="2800" i="1" dirty="0" err="1">
+                <a:solidFill>
+                  <a:schemeClr val="bg1"/>
+                </a:solidFill>
+                <a:latin typeface="Verdana" panose="020B0604030504040204" pitchFamily="34" charset="0"/>
+                <a:ea typeface="Verdana" panose="020B0604030504040204" pitchFamily="34" charset="0"/>
+              </a:rPr>
+              <a:t>só</a:t>
+            </a:r>
+            <a:r>
+              <a:rPr lang="en-US" sz="2800" i="1" dirty="0">
+                <a:solidFill>
+                  <a:schemeClr val="bg1"/>
+                </a:solidFill>
+                <a:latin typeface="Verdana" panose="020B0604030504040204" pitchFamily="34" charset="0"/>
+                <a:ea typeface="Verdana" panose="020B0604030504040204" pitchFamily="34" charset="0"/>
+              </a:rPr>
+              <a:t>. Ela </a:t>
+            </a:r>
+            <a:r>
+              <a:rPr lang="en-US" sz="2800" i="1" dirty="0" err="1">
+                <a:solidFill>
+                  <a:schemeClr val="bg1"/>
+                </a:solidFill>
+                <a:latin typeface="Verdana" panose="020B0604030504040204" pitchFamily="34" charset="0"/>
+                <a:ea typeface="Verdana" panose="020B0604030504040204" pitchFamily="34" charset="0"/>
+              </a:rPr>
+              <a:t>executa</a:t>
+            </a:r>
+            <a:r>
+              <a:rPr lang="en-US" sz="2800" i="1" dirty="0">
+                <a:solidFill>
+                  <a:schemeClr val="bg1"/>
+                </a:solidFill>
+                <a:latin typeface="Verdana" panose="020B0604030504040204" pitchFamily="34" charset="0"/>
+                <a:ea typeface="Verdana" panose="020B0604030504040204" pitchFamily="34" charset="0"/>
+              </a:rPr>
+              <a:t> </a:t>
+            </a:r>
+            <a:r>
+              <a:rPr lang="en-US" sz="2800" i="1" dirty="0" err="1">
+                <a:solidFill>
+                  <a:schemeClr val="bg1"/>
+                </a:solidFill>
+                <a:latin typeface="Verdana" panose="020B0604030504040204" pitchFamily="34" charset="0"/>
+                <a:ea typeface="Verdana" panose="020B0604030504040204" pitchFamily="34" charset="0"/>
+              </a:rPr>
+              <a:t>escolhas</a:t>
+            </a:r>
+            <a:r>
+              <a:rPr lang="en-US" sz="2800" i="1" dirty="0">
+                <a:solidFill>
+                  <a:schemeClr val="bg1"/>
+                </a:solidFill>
+                <a:latin typeface="Verdana" panose="020B0604030504040204" pitchFamily="34" charset="0"/>
+                <a:ea typeface="Verdana" panose="020B0604030504040204" pitchFamily="34" charset="0"/>
+              </a:rPr>
+              <a:t> </a:t>
+            </a:r>
+            <a:r>
+              <a:rPr lang="en-US" sz="2800" i="1" dirty="0" err="1">
+                <a:solidFill>
+                  <a:schemeClr val="bg1"/>
+                </a:solidFill>
+                <a:latin typeface="Verdana" panose="020B0604030504040204" pitchFamily="34" charset="0"/>
+                <a:ea typeface="Verdana" panose="020B0604030504040204" pitchFamily="34" charset="0"/>
+              </a:rPr>
+              <a:t>previamente</a:t>
+            </a:r>
+            <a:r>
+              <a:rPr lang="en-US" sz="2800" i="1" dirty="0">
+                <a:solidFill>
+                  <a:schemeClr val="bg1"/>
+                </a:solidFill>
+                <a:latin typeface="Verdana" panose="020B0604030504040204" pitchFamily="34" charset="0"/>
+                <a:ea typeface="Verdana" panose="020B0604030504040204" pitchFamily="34" charset="0"/>
+              </a:rPr>
+              <a:t> </a:t>
+            </a:r>
+            <a:r>
+              <a:rPr lang="en-US" sz="2800" i="1" dirty="0" err="1">
+                <a:solidFill>
+                  <a:schemeClr val="bg1"/>
+                </a:solidFill>
+                <a:latin typeface="Verdana" panose="020B0604030504040204" pitchFamily="34" charset="0"/>
+                <a:ea typeface="Verdana" panose="020B0604030504040204" pitchFamily="34" charset="0"/>
+              </a:rPr>
+              <a:t>feitas</a:t>
+            </a:r>
+            <a:r>
+              <a:rPr lang="en-US" sz="2800" i="1" dirty="0">
+                <a:solidFill>
+                  <a:schemeClr val="bg1"/>
+                </a:solidFill>
+                <a:latin typeface="Verdana" panose="020B0604030504040204" pitchFamily="34" charset="0"/>
+                <a:ea typeface="Verdana" panose="020B0604030504040204" pitchFamily="34" charset="0"/>
+              </a:rPr>
+              <a:t>. Quando o </a:t>
+            </a:r>
+            <a:r>
+              <a:rPr lang="en-US" sz="2800" i="1" dirty="0" err="1">
+                <a:solidFill>
+                  <a:schemeClr val="bg1"/>
+                </a:solidFill>
+                <a:latin typeface="Verdana" panose="020B0604030504040204" pitchFamily="34" charset="0"/>
+                <a:ea typeface="Verdana" panose="020B0604030504040204" pitchFamily="34" charset="0"/>
+              </a:rPr>
+              <a:t>serviço</a:t>
+            </a:r>
+            <a:r>
+              <a:rPr lang="en-US" sz="2800" i="1" dirty="0">
+                <a:solidFill>
+                  <a:schemeClr val="bg1"/>
+                </a:solidFill>
+                <a:latin typeface="Verdana" panose="020B0604030504040204" pitchFamily="34" charset="0"/>
+                <a:ea typeface="Verdana" panose="020B0604030504040204" pitchFamily="34" charset="0"/>
+              </a:rPr>
+              <a:t> </a:t>
+            </a:r>
+            <a:r>
+              <a:rPr lang="en-US" sz="2800" i="1" dirty="0" err="1">
+                <a:solidFill>
+                  <a:schemeClr val="bg1"/>
+                </a:solidFill>
+                <a:latin typeface="Verdana" panose="020B0604030504040204" pitchFamily="34" charset="0"/>
+                <a:ea typeface="Verdana" panose="020B0604030504040204" pitchFamily="34" charset="0"/>
+              </a:rPr>
+              <a:t>essencial</a:t>
+            </a:r>
+            <a:r>
+              <a:rPr lang="en-US" sz="2800" i="1" dirty="0">
+                <a:solidFill>
+                  <a:schemeClr val="bg1"/>
+                </a:solidFill>
+                <a:latin typeface="Verdana" panose="020B0604030504040204" pitchFamily="34" charset="0"/>
+                <a:ea typeface="Verdana" panose="020B0604030504040204" pitchFamily="34" charset="0"/>
+              </a:rPr>
+              <a:t> </a:t>
+            </a:r>
+            <a:r>
+              <a:rPr lang="en-US" sz="2800" i="1" dirty="0" err="1">
+                <a:solidFill>
+                  <a:schemeClr val="bg1"/>
+                </a:solidFill>
+                <a:latin typeface="Verdana" panose="020B0604030504040204" pitchFamily="34" charset="0"/>
+                <a:ea typeface="Verdana" panose="020B0604030504040204" pitchFamily="34" charset="0"/>
+              </a:rPr>
+              <a:t>passa</a:t>
+            </a:r>
+            <a:r>
+              <a:rPr lang="en-US" sz="2800" i="1" dirty="0">
+                <a:solidFill>
+                  <a:schemeClr val="bg1"/>
+                </a:solidFill>
+                <a:latin typeface="Verdana" panose="020B0604030504040204" pitchFamily="34" charset="0"/>
+                <a:ea typeface="Verdana" panose="020B0604030504040204" pitchFamily="34" charset="0"/>
+              </a:rPr>
+              <a:t> a </a:t>
+            </a:r>
+            <a:r>
+              <a:rPr lang="en-US" sz="2800" i="1" dirty="0" err="1">
+                <a:solidFill>
+                  <a:schemeClr val="bg1"/>
+                </a:solidFill>
+                <a:latin typeface="Verdana" panose="020B0604030504040204" pitchFamily="34" charset="0"/>
+                <a:ea typeface="Verdana" panose="020B0604030504040204" pitchFamily="34" charset="0"/>
+              </a:rPr>
+              <a:t>existir</a:t>
+            </a:r>
+            <a:r>
+              <a:rPr lang="en-US" sz="2800" i="1" dirty="0">
+                <a:solidFill>
+                  <a:schemeClr val="bg1"/>
+                </a:solidFill>
+                <a:latin typeface="Verdana" panose="020B0604030504040204" pitchFamily="34" charset="0"/>
+                <a:ea typeface="Verdana" panose="020B0604030504040204" pitchFamily="34" charset="0"/>
+              </a:rPr>
+              <a:t> </a:t>
+            </a:r>
+            <a:r>
+              <a:rPr lang="en-US" sz="2800" i="1" dirty="0" err="1">
+                <a:solidFill>
+                  <a:schemeClr val="bg1"/>
+                </a:solidFill>
+                <a:latin typeface="Verdana" panose="020B0604030504040204" pitchFamily="34" charset="0"/>
+                <a:ea typeface="Verdana" panose="020B0604030504040204" pitchFamily="34" charset="0"/>
+              </a:rPr>
+              <a:t>apenas</a:t>
+            </a:r>
+            <a:r>
+              <a:rPr lang="en-US" sz="2800" i="1" dirty="0">
+                <a:solidFill>
+                  <a:schemeClr val="bg1"/>
+                </a:solidFill>
+                <a:latin typeface="Verdana" panose="020B0604030504040204" pitchFamily="34" charset="0"/>
+                <a:ea typeface="Verdana" panose="020B0604030504040204" pitchFamily="34" charset="0"/>
+              </a:rPr>
+              <a:t> </a:t>
+            </a:r>
+            <a:r>
+              <a:rPr lang="en-US" sz="2800" i="1" dirty="0" err="1">
+                <a:solidFill>
+                  <a:schemeClr val="bg1"/>
+                </a:solidFill>
+                <a:latin typeface="Verdana" panose="020B0604030504040204" pitchFamily="34" charset="0"/>
+                <a:ea typeface="Verdana" panose="020B0604030504040204" pitchFamily="34" charset="0"/>
+              </a:rPr>
+              <a:t>em</a:t>
+            </a:r>
+            <a:r>
+              <a:rPr lang="en-US" sz="2800" i="1" dirty="0">
+                <a:solidFill>
+                  <a:schemeClr val="bg1"/>
+                </a:solidFill>
+                <a:latin typeface="Verdana" panose="020B0604030504040204" pitchFamily="34" charset="0"/>
+                <a:ea typeface="Verdana" panose="020B0604030504040204" pitchFamily="34" charset="0"/>
+              </a:rPr>
+              <a:t> </a:t>
+            </a:r>
+            <a:r>
+              <a:rPr lang="en-US" sz="2800" i="1" dirty="0" err="1">
+                <a:solidFill>
+                  <a:schemeClr val="bg1"/>
+                </a:solidFill>
+                <a:latin typeface="Verdana" panose="020B0604030504040204" pitchFamily="34" charset="0"/>
+                <a:ea typeface="Verdana" panose="020B0604030504040204" pitchFamily="34" charset="0"/>
+              </a:rPr>
+              <a:t>formato</a:t>
+            </a:r>
+            <a:r>
+              <a:rPr lang="en-US" sz="2800" i="1" dirty="0">
+                <a:solidFill>
+                  <a:schemeClr val="bg1"/>
+                </a:solidFill>
+                <a:latin typeface="Verdana" panose="020B0604030504040204" pitchFamily="34" charset="0"/>
+                <a:ea typeface="Verdana" panose="020B0604030504040204" pitchFamily="34" charset="0"/>
+              </a:rPr>
+              <a:t> digital </a:t>
+            </a:r>
+            <a:r>
+              <a:rPr lang="en-US" sz="2800" i="1" dirty="0" err="1">
+                <a:solidFill>
+                  <a:schemeClr val="bg1"/>
+                </a:solidFill>
+                <a:latin typeface="Verdana" panose="020B0604030504040204" pitchFamily="34" charset="0"/>
+                <a:ea typeface="Verdana" panose="020B0604030504040204" pitchFamily="34" charset="0"/>
+              </a:rPr>
+              <a:t>sem</a:t>
+            </a:r>
+            <a:r>
+              <a:rPr lang="en-US" sz="2800" i="1" dirty="0">
+                <a:solidFill>
+                  <a:schemeClr val="bg1"/>
+                </a:solidFill>
+                <a:latin typeface="Verdana" panose="020B0604030504040204" pitchFamily="34" charset="0"/>
+                <a:ea typeface="Verdana" panose="020B0604030504040204" pitchFamily="34" charset="0"/>
+              </a:rPr>
+              <a:t> </a:t>
+            </a:r>
+            <a:r>
+              <a:rPr lang="en-US" sz="2800" i="1" dirty="0" err="1">
+                <a:solidFill>
+                  <a:schemeClr val="bg1"/>
+                </a:solidFill>
+                <a:latin typeface="Verdana" panose="020B0604030504040204" pitchFamily="34" charset="0"/>
+                <a:ea typeface="Verdana" panose="020B0604030504040204" pitchFamily="34" charset="0"/>
+              </a:rPr>
+              <a:t>que</a:t>
+            </a:r>
+            <a:r>
+              <a:rPr lang="en-US" sz="2800" i="1" dirty="0">
+                <a:solidFill>
+                  <a:schemeClr val="bg1"/>
+                </a:solidFill>
+                <a:latin typeface="Verdana" panose="020B0604030504040204" pitchFamily="34" charset="0"/>
+                <a:ea typeface="Verdana" panose="020B0604030504040204" pitchFamily="34" charset="0"/>
+              </a:rPr>
+              <a:t> se </a:t>
+            </a:r>
+            <a:r>
+              <a:rPr lang="en-US" sz="2800" i="1" dirty="0" err="1">
+                <a:solidFill>
+                  <a:schemeClr val="bg1"/>
+                </a:solidFill>
+                <a:latin typeface="Verdana" panose="020B0604030504040204" pitchFamily="34" charset="0"/>
+                <a:ea typeface="Verdana" panose="020B0604030504040204" pitchFamily="34" charset="0"/>
+              </a:rPr>
+              <a:t>indague</a:t>
+            </a:r>
+            <a:r>
+              <a:rPr lang="en-US" sz="2800" i="1" dirty="0">
+                <a:solidFill>
+                  <a:schemeClr val="bg1"/>
+                </a:solidFill>
+                <a:latin typeface="Verdana" panose="020B0604030504040204" pitchFamily="34" charset="0"/>
+                <a:ea typeface="Verdana" panose="020B0604030504040204" pitchFamily="34" charset="0"/>
+              </a:rPr>
+              <a:t> quem </a:t>
+            </a:r>
+            <a:r>
+              <a:rPr lang="en-US" sz="2800" i="1" dirty="0" err="1">
+                <a:solidFill>
+                  <a:schemeClr val="bg1"/>
+                </a:solidFill>
+                <a:latin typeface="Verdana" panose="020B0604030504040204" pitchFamily="34" charset="0"/>
+                <a:ea typeface="Verdana" panose="020B0604030504040204" pitchFamily="34" charset="0"/>
+              </a:rPr>
+              <a:t>consegue</a:t>
+            </a:r>
+            <a:r>
+              <a:rPr lang="en-US" sz="2800" i="1" dirty="0">
+                <a:solidFill>
+                  <a:schemeClr val="bg1"/>
+                </a:solidFill>
+                <a:latin typeface="Verdana" panose="020B0604030504040204" pitchFamily="34" charset="0"/>
+                <a:ea typeface="Verdana" panose="020B0604030504040204" pitchFamily="34" charset="0"/>
+              </a:rPr>
+              <a:t> </a:t>
+            </a:r>
+            <a:r>
+              <a:rPr lang="en-US" sz="2800" i="1" dirty="0" err="1">
+                <a:solidFill>
+                  <a:schemeClr val="bg1"/>
+                </a:solidFill>
+                <a:latin typeface="Verdana" panose="020B0604030504040204" pitchFamily="34" charset="0"/>
+                <a:ea typeface="Verdana" panose="020B0604030504040204" pitchFamily="34" charset="0"/>
+              </a:rPr>
+              <a:t>alcançá</a:t>
+            </a:r>
+            <a:r>
+              <a:rPr lang="en-US" sz="2800" i="1" dirty="0">
+                <a:solidFill>
+                  <a:schemeClr val="bg1"/>
+                </a:solidFill>
+                <a:latin typeface="Verdana" panose="020B0604030504040204" pitchFamily="34" charset="0"/>
+                <a:ea typeface="Verdana" panose="020B0604030504040204" pitchFamily="34" charset="0"/>
+              </a:rPr>
+              <a:t>-lo, a </a:t>
+            </a:r>
+            <a:r>
+              <a:rPr lang="en-US" sz="2800" i="1" dirty="0" err="1">
+                <a:solidFill>
+                  <a:schemeClr val="bg1"/>
+                </a:solidFill>
+                <a:latin typeface="Verdana" panose="020B0604030504040204" pitchFamily="34" charset="0"/>
+                <a:ea typeface="Verdana" panose="020B0604030504040204" pitchFamily="34" charset="0"/>
+              </a:rPr>
+              <a:t>exclusão</a:t>
+            </a:r>
+            <a:r>
+              <a:rPr lang="en-US" sz="2800" i="1" dirty="0">
+                <a:solidFill>
+                  <a:schemeClr val="bg1"/>
+                </a:solidFill>
+                <a:latin typeface="Verdana" panose="020B0604030504040204" pitchFamily="34" charset="0"/>
+                <a:ea typeface="Verdana" panose="020B0604030504040204" pitchFamily="34" charset="0"/>
+              </a:rPr>
+              <a:t> </a:t>
+            </a:r>
+            <a:r>
+              <a:rPr lang="en-US" sz="2800" i="1" dirty="0" err="1">
+                <a:solidFill>
+                  <a:schemeClr val="bg1"/>
+                </a:solidFill>
+                <a:latin typeface="Verdana" panose="020B0604030504040204" pitchFamily="34" charset="0"/>
+                <a:ea typeface="Verdana" panose="020B0604030504040204" pitchFamily="34" charset="0"/>
+              </a:rPr>
+              <a:t>deixa</a:t>
+            </a:r>
+            <a:r>
+              <a:rPr lang="en-US" sz="2800" i="1" dirty="0">
+                <a:solidFill>
+                  <a:schemeClr val="bg1"/>
+                </a:solidFill>
+                <a:latin typeface="Verdana" panose="020B0604030504040204" pitchFamily="34" charset="0"/>
+                <a:ea typeface="Verdana" panose="020B0604030504040204" pitchFamily="34" charset="0"/>
+              </a:rPr>
+              <a:t> de ser </a:t>
+            </a:r>
+            <a:r>
+              <a:rPr lang="en-US" sz="2800" i="1" dirty="0" err="1">
+                <a:solidFill>
+                  <a:schemeClr val="bg1"/>
+                </a:solidFill>
+                <a:latin typeface="Verdana" panose="020B0604030504040204" pitchFamily="34" charset="0"/>
+                <a:ea typeface="Verdana" panose="020B0604030504040204" pitchFamily="34" charset="0"/>
+              </a:rPr>
+              <a:t>efeito</a:t>
+            </a:r>
+            <a:r>
+              <a:rPr lang="en-US" sz="2800" i="1" dirty="0">
+                <a:solidFill>
+                  <a:schemeClr val="bg1"/>
+                </a:solidFill>
+                <a:latin typeface="Verdana" panose="020B0604030504040204" pitchFamily="34" charset="0"/>
+                <a:ea typeface="Verdana" panose="020B0604030504040204" pitchFamily="34" charset="0"/>
+              </a:rPr>
+              <a:t> </a:t>
+            </a:r>
+            <a:r>
+              <a:rPr lang="en-US" sz="2800" i="1" dirty="0" err="1">
+                <a:solidFill>
+                  <a:schemeClr val="bg1"/>
+                </a:solidFill>
+                <a:latin typeface="Verdana" panose="020B0604030504040204" pitchFamily="34" charset="0"/>
+                <a:ea typeface="Verdana" panose="020B0604030504040204" pitchFamily="34" charset="0"/>
+              </a:rPr>
+              <a:t>colateral</a:t>
+            </a:r>
+            <a:r>
+              <a:rPr lang="en-US" sz="2800" i="1" dirty="0">
+                <a:solidFill>
+                  <a:schemeClr val="bg1"/>
+                </a:solidFill>
+                <a:latin typeface="Verdana" panose="020B0604030504040204" pitchFamily="34" charset="0"/>
+                <a:ea typeface="Verdana" panose="020B0604030504040204" pitchFamily="34" charset="0"/>
+              </a:rPr>
+              <a:t> e </a:t>
+            </a:r>
+            <a:r>
+              <a:rPr lang="en-US" sz="2800" i="1" dirty="0" err="1">
+                <a:solidFill>
+                  <a:schemeClr val="bg1"/>
+                </a:solidFill>
+                <a:latin typeface="Verdana" panose="020B0604030504040204" pitchFamily="34" charset="0"/>
+                <a:ea typeface="Verdana" panose="020B0604030504040204" pitchFamily="34" charset="0"/>
+              </a:rPr>
+              <a:t>passa</a:t>
+            </a:r>
+            <a:r>
+              <a:rPr lang="en-US" sz="2800" i="1" dirty="0">
+                <a:solidFill>
+                  <a:schemeClr val="bg1"/>
+                </a:solidFill>
+                <a:latin typeface="Verdana" panose="020B0604030504040204" pitchFamily="34" charset="0"/>
+                <a:ea typeface="Verdana" panose="020B0604030504040204" pitchFamily="34" charset="0"/>
+              </a:rPr>
+              <a:t> a ser </a:t>
+            </a:r>
+            <a:r>
+              <a:rPr lang="en-US" sz="2800" i="1" dirty="0" err="1">
+                <a:solidFill>
+                  <a:schemeClr val="bg1"/>
+                </a:solidFill>
+                <a:latin typeface="Verdana" panose="020B0604030504040204" pitchFamily="34" charset="0"/>
+                <a:ea typeface="Verdana" panose="020B0604030504040204" pitchFamily="34" charset="0"/>
+              </a:rPr>
+              <a:t>decisão</a:t>
+            </a:r>
+            <a:r>
+              <a:rPr lang="en-US" sz="2800" i="1" dirty="0">
+                <a:solidFill>
+                  <a:schemeClr val="bg1"/>
+                </a:solidFill>
+                <a:latin typeface="Verdana" panose="020B0604030504040204" pitchFamily="34" charset="0"/>
+                <a:ea typeface="Verdana" panose="020B0604030504040204" pitchFamily="34" charset="0"/>
               </a:rPr>
               <a:t> de </a:t>
             </a:r>
             <a:r>
-              <a:rPr lang="en-US" altLang="pt-BR" sz="3200" i="1" dirty="0" err="1">
+              <a:rPr lang="en-US" sz="2800" i="1" dirty="0" err="1">
                 <a:solidFill>
                   <a:schemeClr val="bg1"/>
                 </a:solidFill>
                 <a:latin typeface="Verdana" panose="020B0604030504040204" pitchFamily="34" charset="0"/>
-              </a:rPr>
-              <a:t>agradecimentos</a:t>
-            </a:r>
-            <a:endParaRPr lang="en-US" altLang="pt-BR" sz="3200" i="1" dirty="0">
-              <a:solidFill>
-                <a:schemeClr val="bg1"/>
-              </a:solidFill>
-              <a:latin typeface="Verdana" panose="020B0604030504040204" pitchFamily="34" charset="0"/>
-            </a:endParaRPr>
-          </a:p>
-          <a:p>
-            <a:pPr algn="ctr" eaLnBrk="1" hangingPunct="1"/>
-            <a:r>
-              <a:rPr lang="en-US" altLang="pt-BR" sz="3200" i="1" dirty="0">
+                <a:ea typeface="Verdana" panose="020B0604030504040204" pitchFamily="34" charset="0"/>
+              </a:rPr>
+              <a:t>projeto</a:t>
+            </a:r>
+            <a:r>
+              <a:rPr lang="en-US" sz="2800" i="1" dirty="0">
                 <a:solidFill>
                   <a:schemeClr val="bg1"/>
                 </a:solidFill>
                 <a:latin typeface="Verdana" panose="020B0604030504040204" pitchFamily="34" charset="0"/>
-              </a:rPr>
-              <a:t>   </a:t>
-            </a:r>
-            <a:r>
-              <a:rPr lang="en-US" altLang="pt-BR" sz="3200" i="1" dirty="0" err="1">
+                <a:ea typeface="Verdana" panose="020B0604030504040204" pitchFamily="34" charset="0"/>
+              </a:rPr>
+              <a:t>."</a:t>
+            </a:r>
+            <a:r>
+              <a:rPr lang="en-US" sz="2800" dirty="0">
                 <a:solidFill>
                   <a:schemeClr val="bg1"/>
                 </a:solidFill>
                 <a:latin typeface="Verdana" panose="020B0604030504040204" pitchFamily="34" charset="0"/>
-              </a:rPr>
-              <a:t>ou</a:t>
-            </a:r>
-            <a:r>
-              <a:rPr lang="en-US" altLang="pt-BR" sz="3200" i="1" dirty="0">
+                <a:ea typeface="Verdana" panose="020B0604030504040204" pitchFamily="34" charset="0"/>
+              </a:rPr>
+              <a:t> (MAIA, 2026).</a:t>
+            </a:r>
+            <a:r>
+              <a:rPr lang="en-US" altLang="pt-BR" sz="2800" i="1" dirty="0">
                 <a:solidFill>
                   <a:schemeClr val="bg1"/>
                 </a:solidFill>
                 <a:latin typeface="Verdana" panose="020B0604030504040204" pitchFamily="34" charset="0"/>
-              </a:rPr>
-              <a:t> </a:t>
-            </a:r>
-            <a:r>
-              <a:rPr lang="en-US" altLang="pt-BR" sz="3200" i="1" dirty="0" err="1">
-                <a:solidFill>
-                  <a:schemeClr val="bg1"/>
-                </a:solidFill>
-                <a:latin typeface="Verdana" panose="020B0604030504040204" pitchFamily="34" charset="0"/>
-              </a:rPr>
-              <a:t>informações</a:t>
-            </a:r>
-            <a:r>
-              <a:rPr lang="en-US" altLang="pt-BR" sz="3200" i="1" dirty="0">
-                <a:solidFill>
-                  <a:schemeClr val="bg1"/>
-                </a:solidFill>
-                <a:latin typeface="Verdana" panose="020B0604030504040204" pitchFamily="34" charset="0"/>
-              </a:rPr>
-              <a:t> </a:t>
-            </a:r>
-            <a:r>
-              <a:rPr lang="en-US" altLang="pt-BR" sz="3200" i="1" dirty="0" err="1">
-                <a:solidFill>
-                  <a:schemeClr val="bg1"/>
-                </a:solidFill>
-                <a:latin typeface="Verdana" panose="020B0604030504040204" pitchFamily="34" charset="0"/>
-              </a:rPr>
-              <a:t>importantes</a:t>
-            </a:r>
-            <a:r>
-              <a:rPr lang="en-US" altLang="pt-BR" sz="3200" i="1" dirty="0">
-                <a:solidFill>
-                  <a:schemeClr val="bg1"/>
-                </a:solidFill>
-                <a:latin typeface="Verdana" panose="020B0604030504040204" pitchFamily="34" charset="0"/>
+                <a:ea typeface="Verdana" panose="020B0604030504040204" pitchFamily="34" charset="0"/>
               </a:rPr>
               <a:t>”</a:t>
             </a:r>
-            <a:endParaRPr lang="pt-BR" altLang="pt-BR" sz="3200" dirty="0">
+            <a:endParaRPr lang="pt-BR" altLang="pt-BR" sz="2800" dirty="0">
               <a:solidFill>
                 <a:srgbClr val="002D55"/>
               </a:solidFill>
@@ -5825,33 +6300,42 @@
                 <a:latin typeface="Verdana" pitchFamily="34" charset="0"/>
                 <a:ea typeface="Verdana" pitchFamily="34" charset="0"/>
               </a:rPr>
-              <a:t>A dificuldade de idosos no uso de aplicativos móveis governamentais</a:t>
-            </a:r>
-          </a:p>
-          <a:p>
-            <a:pPr marL="285750" indent="-285750"/>
+              <a:t>PROBLEMÁTICA:</a:t>
+            </a:r>
+          </a:p>
+          <a:p>
+            <a:pPr marL="1028700" lvl="1"/>
             <a:r>
               <a:rPr lang="pt-BR" sz="1400" dirty="0">
                 <a:latin typeface="Verdana" pitchFamily="34" charset="0"/>
                 <a:ea typeface="Verdana" pitchFamily="34" charset="0"/>
               </a:rPr>
-              <a:t>Exclusão digital decorrente da extinção de canais físicos de atendimento</a:t>
-            </a:r>
-          </a:p>
-          <a:p>
-            <a:pPr marL="285750" indent="-285750"/>
+              <a:t>A dificuldade de idosos no uso de aplicativos móveis governamentais</a:t>
+            </a:r>
+          </a:p>
+          <a:p>
+            <a:pPr marL="1028700" lvl="1"/>
             <a:r>
               <a:rPr lang="pt-BR" sz="1400" dirty="0">
                 <a:latin typeface="Verdana" pitchFamily="34" charset="0"/>
                 <a:ea typeface="Verdana" pitchFamily="34" charset="0"/>
               </a:rPr>
+              <a:t>Exclusão digital decorrente da extinção de canais físicos de atendimento</a:t>
+            </a:r>
+          </a:p>
+          <a:p>
+            <a:pPr marL="1028700" lvl="1"/>
+            <a:r>
+              <a:rPr lang="pt-BR" sz="1400" dirty="0">
+                <a:latin typeface="Verdana" pitchFamily="34" charset="0"/>
+                <a:ea typeface="Verdana" pitchFamily="34" charset="0"/>
+              </a:rPr>
               <a:t>Perda de autonomia e dependência de terceiros</a:t>
             </a:r>
           </a:p>
           <a:p>
-            <a:pPr marL="171450" indent="-171450">
-              <a:buFont typeface="Wingdings" pitchFamily="2" charset="2"/>
-              <a:buChar char="ü"/>
+            <a:pPr>
+              <a:buNone/>
             </a:pPr>
             <a:endParaRPr lang="pt-BR" sz="1400" dirty="0">
               <a:latin typeface="Verdana" pitchFamily="34" charset="0"/>
@@ -5865,18 +6349,42 @@
                 <a:latin typeface="Verdana" pitchFamily="34" charset="0"/>
                 <a:ea typeface="Verdana" pitchFamily="34" charset="0"/>
               </a:rPr>
-              <a:t>Necessidade de preservar a autonomia e cidadania da terceira idade</a:t>
-            </a:r>
-          </a:p>
-          <a:p>
-            <a:pPr marL="285750" indent="-285750"/>
+              <a:t>JUSTIFICATIVA:</a:t>
+            </a:r>
+          </a:p>
+          <a:p>
+            <a:pPr marL="1028700" lvl="1"/>
             <a:r>
               <a:rPr lang="pt-BR" sz="1400" dirty="0">
                 <a:latin typeface="Verdana" pitchFamily="34" charset="0"/>
                 <a:ea typeface="Verdana" pitchFamily="34" charset="0"/>
               </a:rPr>
+              <a:t>Necessidade de preservar a autonomia e cidadania da terceira idade</a:t>
+            </a:r>
+          </a:p>
+          <a:p>
+            <a:pPr marL="1028700" lvl="1"/>
+            <a:r>
+              <a:rPr lang="pt-BR" sz="1400" dirty="0">
+                <a:latin typeface="Verdana" pitchFamily="34" charset="0"/>
+                <a:ea typeface="Verdana" pitchFamily="34" charset="0"/>
+              </a:rPr>
               <a:t>Importância de garantir acesso igualitário aos serviços essenciais do Estado</a:t>
             </a:r>
+          </a:p>
+          <a:p>
+            <a:pPr marL="1028700" lvl="1"/>
+            <a:endParaRPr lang="pt-BR" sz="1400" dirty="0">
+              <a:latin typeface="Verdana" pitchFamily="34" charset="0"/>
+              <a:ea typeface="Verdana" pitchFamily="34" charset="0"/>
+            </a:endParaRPr>
+          </a:p>
+          <a:p>
+            <a:pPr marL="1028700" lvl="1"/>
+            <a:endParaRPr lang="pt-BR" sz="1400" dirty="0">
+              <a:latin typeface="Verdana" pitchFamily="34" charset="0"/>
+              <a:ea typeface="Verdana" pitchFamily="34" charset="0"/>
+            </a:endParaRPr>
           </a:p>
           <a:p>
             <a:pPr>
@@ -6431,21 +6939,48 @@
                 <a:latin typeface="Verdana" panose="020B0604030504040204" pitchFamily="34" charset="0"/>
                 <a:ea typeface="Verdana" panose="020B0604030504040204" pitchFamily="34" charset="0"/>
               </a:rPr>
+              <a:t>OBJETIVO GERAL:</a:t>
+            </a:r>
+          </a:p>
+          <a:p>
+            <a:pPr marL="1028700" lvl="1"/>
+            <a:r>
+              <a:rPr lang="pt-BR" sz="1400" dirty="0">
+                <a:latin typeface="Verdana" panose="020B0604030504040204" pitchFamily="34" charset="0"/>
+                <a:ea typeface="Verdana" panose="020B0604030504040204" pitchFamily="34" charset="0"/>
+              </a:rPr>
               <a:t>Identificar as principais barreiras de acessibilidade digital enfrentadas pelos idosos no uso de aplicativos móveis de serviços públicos, visando promover a inclusão digital e preservar sua autonomia.</a:t>
             </a:r>
           </a:p>
           <a:p>
+            <a:pPr marL="1028700" lvl="1"/>
+            <a:endParaRPr lang="pt-BR" sz="1000" dirty="0">
+              <a:latin typeface="Verdana" panose="020B0604030504040204" pitchFamily="34" charset="0"/>
+              <a:ea typeface="Verdana" panose="020B0604030504040204" pitchFamily="34" charset="0"/>
+            </a:endParaRPr>
+          </a:p>
+          <a:p>
             <a:pPr marL="285750" indent="-285750"/>
             <a:r>
               <a:rPr lang="pt-BR" sz="1400" dirty="0">
                 <a:latin typeface="Verdana" panose="020B0604030504040204" pitchFamily="34" charset="0"/>
                 <a:ea typeface="Verdana" panose="020B0604030504040204" pitchFamily="34" charset="0"/>
               </a:rPr>
+              <a:t>OBJETIVOS ESPECÍFICOS:</a:t>
+            </a:r>
+          </a:p>
+          <a:p>
+            <a:pPr marL="1028700" lvl="1"/>
+            <a:r>
+              <a:rPr lang="pt-BR" sz="1400" dirty="0">
+                <a:latin typeface="Verdana" panose="020B0604030504040204" pitchFamily="34" charset="0"/>
+                <a:ea typeface="Verdana" panose="020B0604030504040204" pitchFamily="34" charset="0"/>
+              </a:rPr>
               <a:t>Buscar soluções para a inclusão digital das pessoas de terceira idade.</a:t>
             </a:r>
           </a:p>
           <a:p>
-            <a:pPr marL="285750" indent="-285750"/>
+            <a:pPr marL="1028700" lvl="1"/>
             <a:r>
               <a:rPr lang="pt-BR" sz="1400" dirty="0">
                 <a:latin typeface="Verdana" panose="020B0604030504040204" pitchFamily="34" charset="0"/>
@@ -6453,12 +6988,19 @@
               </a:rPr>
               <a:t>Melhorar a usabilidade do sistema contribuindo com a inclusão.</a:t>
             </a:r>
+          </a:p>
+          <a:p>
+            <a:pPr marL="1028700" lvl="1"/>
+            <a:endParaRPr lang="pt-BR" sz="1400" dirty="0">
+              <a:latin typeface="Verdana" panose="020B0604030504040204" pitchFamily="34" charset="0"/>
+              <a:ea typeface="Verdana" panose="020B0604030504040204" pitchFamily="34" charset="0"/>
+            </a:endParaRPr>
           </a:p>
           <a:p>
             <a:pPr marL="285750" indent="-285750"/>
             <a:endParaRPr lang="pt-BR" sz="1400" dirty="0">
-              <a:latin typeface="Verdana" pitchFamily="34" charset="0"/>
-              <a:ea typeface="Verdana" pitchFamily="34" charset="0"/>
+              <a:latin typeface="Verdana" panose="020B0604030504040204" pitchFamily="34" charset="0"/>
+              <a:ea typeface="Verdana" panose="020B0604030504040204" pitchFamily="34" charset="0"/>
             </a:endParaRPr>
           </a:p>
           <a:p>
@@ -6467,8 +7009,8 @@
               <a:buChar char="ü"/>
             </a:pPr>
             <a:endParaRPr lang="pt-BR" sz="1400" dirty="0">
-              <a:latin typeface="Verdana" pitchFamily="34" charset="0"/>
-              <a:ea typeface="Verdana" pitchFamily="34" charset="0"/>
+              <a:latin typeface="Verdana" panose="020B0604030504040204" pitchFamily="34" charset="0"/>
+              <a:ea typeface="Verdana" panose="020B0604030504040204" pitchFamily="34" charset="0"/>
             </a:endParaRPr>
           </a:p>
           <a:p>
@@ -6476,8 +7018,8 @@
               <a:buNone/>
             </a:pPr>
             <a:endParaRPr lang="pt-BR" sz="1400" dirty="0">
-              <a:latin typeface="Verdana" pitchFamily="34" charset="0"/>
-              <a:ea typeface="Verdana" pitchFamily="34" charset="0"/>
+              <a:latin typeface="Verdana" panose="020B0604030504040204" pitchFamily="34" charset="0"/>
+              <a:ea typeface="Verdana" panose="020B0604030504040204" pitchFamily="34" charset="0"/>
             </a:endParaRPr>
           </a:p>
           <a:p>
@@ -6486,8 +7028,8 @@
             </a:pPr>
             <a:r>
               <a:rPr lang="pt-BR" sz="1400" dirty="0">
-                <a:latin typeface="Verdana" pitchFamily="34" charset="0"/>
-                <a:ea typeface="Verdana" pitchFamily="34" charset="0"/>
+                <a:latin typeface="Verdana" panose="020B0604030504040204" pitchFamily="34" charset="0"/>
+                <a:ea typeface="Verdana" panose="020B0604030504040204" pitchFamily="34" charset="0"/>
               </a:rPr>
               <a:t> </a:t>
             </a:r>
@@ -6498,8 +7040,8 @@
               <a:buChar char="ü"/>
             </a:pPr>
             <a:endParaRPr lang="pt-BR" sz="1400" dirty="0">
-              <a:latin typeface="Verdana" pitchFamily="34" charset="0"/>
-              <a:ea typeface="Verdana" pitchFamily="34" charset="0"/>
+              <a:latin typeface="Verdana" panose="020B0604030504040204" pitchFamily="34" charset="0"/>
+              <a:ea typeface="Verdana" panose="020B0604030504040204" pitchFamily="34" charset="0"/>
             </a:endParaRPr>
           </a:p>
         </p:txBody>
@@ -6899,7 +7441,7 @@
         <p:spPr bwMode="auto">
           <a:xfrm>
             <a:off x="5630067" y="777875"/>
-            <a:ext cx="5283202" cy="1015663"/>
+            <a:ext cx="5661910" cy="1015663"/>
           </a:xfrm>
           <a:prstGeom prst="rect">
             <a:avLst/>
@@ -6929,7 +7471,7 @@
           </a:extLst>
         </p:spPr>
         <p:txBody>
-          <a:bodyPr>
+          <a:bodyPr wrap="square">
             <a:spAutoFit/>
           </a:bodyPr>
           <a:lstStyle>
@@ -7204,21 +7746,267 @@
               <a:buNone/>
             </a:pPr>
             <a:r>
-              <a:rPr lang="pt-BR" sz="1800" dirty="0">
-                <a:effectLst/>
-                <a:latin typeface="Verdana" panose="020B0604030504040204" pitchFamily="34" charset="0"/>
-                <a:ea typeface="Verdana" panose="020B0604030504040204" pitchFamily="34" charset="0"/>
-              </a:rPr>
-              <a:t>É uma abordagem qualitativa, de natureza teórica, sem procedimentos práticos e baseados em referenciais teóricos. </a:t>
-            </a:r>
-          </a:p>
-          <a:p>
-            <a:pPr>
-              <a:buNone/>
-            </a:pPr>
+              <a:rPr lang="en-US" sz="1400" dirty="0">
+                <a:latin typeface="Verdana" panose="020B0604030504040204" pitchFamily="34" charset="0"/>
+                <a:ea typeface="Verdana" panose="020B0604030504040204" pitchFamily="34" charset="0"/>
+              </a:rPr>
+              <a:t>É </a:t>
+            </a:r>
+            <a:r>
+              <a:rPr lang="en-US" sz="1400" dirty="0" err="1">
+                <a:latin typeface="Verdana" panose="020B0604030504040204" pitchFamily="34" charset="0"/>
+                <a:ea typeface="Verdana" panose="020B0604030504040204" pitchFamily="34" charset="0"/>
+              </a:rPr>
+              <a:t>uma</a:t>
+            </a:r>
+            <a:r>
+              <a:rPr lang="en-US" sz="1400" dirty="0">
+                <a:latin typeface="Verdana" panose="020B0604030504040204" pitchFamily="34" charset="0"/>
+                <a:ea typeface="Verdana" panose="020B0604030504040204" pitchFamily="34" charset="0"/>
+              </a:rPr>
+              <a:t> </a:t>
+            </a:r>
+            <a:r>
+              <a:rPr lang="en-US" sz="1400" dirty="0" err="1">
+                <a:latin typeface="Verdana" panose="020B0604030504040204" pitchFamily="34" charset="0"/>
+                <a:ea typeface="Verdana" panose="020B0604030504040204" pitchFamily="34" charset="0"/>
+              </a:rPr>
+              <a:t>abordagem</a:t>
+            </a:r>
+            <a:r>
+              <a:rPr lang="en-US" sz="1400" dirty="0">
+                <a:latin typeface="Verdana" panose="020B0604030504040204" pitchFamily="34" charset="0"/>
+                <a:ea typeface="Verdana" panose="020B0604030504040204" pitchFamily="34" charset="0"/>
+              </a:rPr>
+              <a:t> </a:t>
+            </a:r>
+            <a:r>
+              <a:rPr lang="en-US" sz="1400" dirty="0" err="1">
+                <a:latin typeface="Verdana" panose="020B0604030504040204" pitchFamily="34" charset="0"/>
+                <a:ea typeface="Verdana" panose="020B0604030504040204" pitchFamily="34" charset="0"/>
+              </a:rPr>
+              <a:t>qualitativa</a:t>
+            </a:r>
+            <a:r>
+              <a:rPr lang="en-US" sz="1400" dirty="0">
+                <a:latin typeface="Verdana" panose="020B0604030504040204" pitchFamily="34" charset="0"/>
+                <a:ea typeface="Verdana" panose="020B0604030504040204" pitchFamily="34" charset="0"/>
+              </a:rPr>
+              <a:t>, de </a:t>
+            </a:r>
+            <a:r>
+              <a:rPr lang="en-US" sz="1400" dirty="0" err="1">
+                <a:latin typeface="Verdana" panose="020B0604030504040204" pitchFamily="34" charset="0"/>
+                <a:ea typeface="Verdana" panose="020B0604030504040204" pitchFamily="34" charset="0"/>
+              </a:rPr>
+              <a:t>natureza</a:t>
+            </a:r>
+            <a:r>
+              <a:rPr lang="en-US" sz="1400" dirty="0">
+                <a:latin typeface="Verdana" panose="020B0604030504040204" pitchFamily="34" charset="0"/>
+                <a:ea typeface="Verdana" panose="020B0604030504040204" pitchFamily="34" charset="0"/>
+              </a:rPr>
+              <a:t> </a:t>
+            </a:r>
+            <a:r>
+              <a:rPr lang="en-US" sz="1400" dirty="0" err="1">
+                <a:latin typeface="Verdana" panose="020B0604030504040204" pitchFamily="34" charset="0"/>
+                <a:ea typeface="Verdana" panose="020B0604030504040204" pitchFamily="34" charset="0"/>
+              </a:rPr>
+              <a:t>teórica</a:t>
+            </a:r>
+            <a:r>
+              <a:rPr lang="en-US" sz="1400" dirty="0">
+                <a:latin typeface="Verdana" panose="020B0604030504040204" pitchFamily="34" charset="0"/>
+                <a:ea typeface="Verdana" panose="020B0604030504040204" pitchFamily="34" charset="0"/>
+              </a:rPr>
+              <a:t>, </a:t>
+            </a:r>
+            <a:r>
+              <a:rPr lang="en-US" sz="1400" dirty="0" err="1">
+                <a:latin typeface="Verdana" panose="020B0604030504040204" pitchFamily="34" charset="0"/>
+                <a:ea typeface="Verdana" panose="020B0604030504040204" pitchFamily="34" charset="0"/>
+              </a:rPr>
+              <a:t>sem</a:t>
+            </a:r>
+            <a:r>
+              <a:rPr lang="en-US" sz="1400" dirty="0">
+                <a:latin typeface="Verdana" panose="020B0604030504040204" pitchFamily="34" charset="0"/>
+                <a:ea typeface="Verdana" panose="020B0604030504040204" pitchFamily="34" charset="0"/>
+              </a:rPr>
+              <a:t> </a:t>
+            </a:r>
+            <a:r>
+              <a:rPr lang="en-US" sz="1400" dirty="0" err="1">
+                <a:latin typeface="Verdana" panose="020B0604030504040204" pitchFamily="34" charset="0"/>
+                <a:ea typeface="Verdana" panose="020B0604030504040204" pitchFamily="34" charset="0"/>
+              </a:rPr>
+              <a:t>procedimentos</a:t>
+            </a:r>
+            <a:r>
+              <a:rPr lang="en-US" sz="1400" dirty="0">
+                <a:latin typeface="Verdana" panose="020B0604030504040204" pitchFamily="34" charset="0"/>
+                <a:ea typeface="Verdana" panose="020B0604030504040204" pitchFamily="34" charset="0"/>
+              </a:rPr>
+              <a:t> </a:t>
+            </a:r>
+            <a:r>
+              <a:rPr lang="en-US" sz="1400" dirty="0" err="1">
+                <a:latin typeface="Verdana" panose="020B0604030504040204" pitchFamily="34" charset="0"/>
+                <a:ea typeface="Verdana" panose="020B0604030504040204" pitchFamily="34" charset="0"/>
+              </a:rPr>
+              <a:t>práticos</a:t>
+            </a:r>
+            <a:r>
+              <a:rPr lang="en-US" sz="1400" dirty="0">
+                <a:latin typeface="Verdana" panose="020B0604030504040204" pitchFamily="34" charset="0"/>
+                <a:ea typeface="Verdana" panose="020B0604030504040204" pitchFamily="34" charset="0"/>
+              </a:rPr>
+              <a:t>, </a:t>
+            </a:r>
+            <a:r>
+              <a:rPr lang="en-US" sz="1400" dirty="0" err="1">
+                <a:latin typeface="Verdana" panose="020B0604030504040204" pitchFamily="34" charset="0"/>
+                <a:ea typeface="Verdana" panose="020B0604030504040204" pitchFamily="34" charset="0"/>
+              </a:rPr>
+              <a:t>baseada</a:t>
+            </a:r>
+            <a:r>
+              <a:rPr lang="en-US" sz="1400" dirty="0">
+                <a:latin typeface="Verdana" panose="020B0604030504040204" pitchFamily="34" charset="0"/>
+                <a:ea typeface="Verdana" panose="020B0604030504040204" pitchFamily="34" charset="0"/>
+              </a:rPr>
+              <a:t> </a:t>
+            </a:r>
+            <a:r>
+              <a:rPr lang="en-US" sz="1400" dirty="0" err="1">
+                <a:latin typeface="Verdana" panose="020B0604030504040204" pitchFamily="34" charset="0"/>
+                <a:ea typeface="Verdana" panose="020B0604030504040204" pitchFamily="34" charset="0"/>
+              </a:rPr>
+              <a:t>em</a:t>
+            </a:r>
+            <a:r>
+              <a:rPr lang="en-US" sz="1400" dirty="0">
+                <a:latin typeface="Verdana" panose="020B0604030504040204" pitchFamily="34" charset="0"/>
+                <a:ea typeface="Verdana" panose="020B0604030504040204" pitchFamily="34" charset="0"/>
+              </a:rPr>
+              <a:t> </a:t>
+            </a:r>
+            <a:r>
+              <a:rPr lang="en-US" sz="1400" dirty="0" err="1">
+                <a:latin typeface="Verdana" panose="020B0604030504040204" pitchFamily="34" charset="0"/>
+                <a:ea typeface="Verdana" panose="020B0604030504040204" pitchFamily="34" charset="0"/>
+              </a:rPr>
+              <a:t>referenciais</a:t>
+            </a:r>
+            <a:r>
+              <a:rPr lang="en-US" sz="1400" dirty="0">
+                <a:latin typeface="Verdana" panose="020B0604030504040204" pitchFamily="34" charset="0"/>
+                <a:ea typeface="Verdana" panose="020B0604030504040204" pitchFamily="34" charset="0"/>
+              </a:rPr>
+              <a:t> </a:t>
+            </a:r>
+            <a:r>
+              <a:rPr lang="en-US" sz="1400" dirty="0" err="1">
+                <a:latin typeface="Verdana" panose="020B0604030504040204" pitchFamily="34" charset="0"/>
+                <a:ea typeface="Verdana" panose="020B0604030504040204" pitchFamily="34" charset="0"/>
+              </a:rPr>
+              <a:t>teóricos</a:t>
+            </a:r>
+            <a:r>
+              <a:rPr lang="en-US" sz="1400" dirty="0">
+                <a:latin typeface="Verdana" panose="020B0604030504040204" pitchFamily="34" charset="0"/>
+                <a:ea typeface="Verdana" panose="020B0604030504040204" pitchFamily="34" charset="0"/>
+              </a:rPr>
+              <a:t> </a:t>
+            </a:r>
+            <a:r>
+              <a:rPr lang="en-US" sz="1400" dirty="0" err="1">
+                <a:latin typeface="Verdana" panose="020B0604030504040204" pitchFamily="34" charset="0"/>
+                <a:ea typeface="Verdana" panose="020B0604030504040204" pitchFamily="34" charset="0"/>
+              </a:rPr>
+              <a:t>sobre</a:t>
+            </a:r>
+            <a:r>
+              <a:rPr lang="en-US" sz="1400" dirty="0">
+                <a:latin typeface="Verdana" panose="020B0604030504040204" pitchFamily="34" charset="0"/>
+                <a:ea typeface="Verdana" panose="020B0604030504040204" pitchFamily="34" charset="0"/>
+              </a:rPr>
+              <a:t> a </a:t>
+            </a:r>
+            <a:r>
+              <a:rPr lang="en-US" sz="1400" dirty="0" err="1">
+                <a:latin typeface="Verdana" panose="020B0604030504040204" pitchFamily="34" charset="0"/>
+                <a:ea typeface="Verdana" panose="020B0604030504040204" pitchFamily="34" charset="0"/>
+              </a:rPr>
+              <a:t>acessibilidade</a:t>
+            </a:r>
+            <a:r>
+              <a:rPr lang="en-US" sz="1400" dirty="0">
+                <a:latin typeface="Verdana" panose="020B0604030504040204" pitchFamily="34" charset="0"/>
+                <a:ea typeface="Verdana" panose="020B0604030504040204" pitchFamily="34" charset="0"/>
+              </a:rPr>
+              <a:t> de </a:t>
+            </a:r>
+            <a:r>
+              <a:rPr lang="en-US" sz="1400" dirty="0" err="1">
+                <a:latin typeface="Verdana" panose="020B0604030504040204" pitchFamily="34" charset="0"/>
+                <a:ea typeface="Verdana" panose="020B0604030504040204" pitchFamily="34" charset="0"/>
+              </a:rPr>
+              <a:t>idosos</a:t>
+            </a:r>
+            <a:r>
+              <a:rPr lang="en-US" sz="1400" dirty="0">
+                <a:latin typeface="Verdana" panose="020B0604030504040204" pitchFamily="34" charset="0"/>
+                <a:ea typeface="Verdana" panose="020B0604030504040204" pitchFamily="34" charset="0"/>
+              </a:rPr>
+              <a:t> </a:t>
+            </a:r>
+            <a:r>
+              <a:rPr lang="en-US" sz="1400" dirty="0" err="1">
+                <a:latin typeface="Verdana" panose="020B0604030504040204" pitchFamily="34" charset="0"/>
+                <a:ea typeface="Verdana" panose="020B0604030504040204" pitchFamily="34" charset="0"/>
+              </a:rPr>
+              <a:t>em</a:t>
+            </a:r>
+            <a:r>
+              <a:rPr lang="en-US" sz="1400" dirty="0">
+                <a:latin typeface="Verdana" panose="020B0604030504040204" pitchFamily="34" charset="0"/>
+                <a:ea typeface="Verdana" panose="020B0604030504040204" pitchFamily="34" charset="0"/>
+              </a:rPr>
+              <a:t> </a:t>
+            </a:r>
+            <a:r>
+              <a:rPr lang="en-US" sz="1400" dirty="0" err="1">
+                <a:latin typeface="Verdana" panose="020B0604030504040204" pitchFamily="34" charset="0"/>
+                <a:ea typeface="Verdana" panose="020B0604030504040204" pitchFamily="34" charset="0"/>
+              </a:rPr>
+              <a:t>aplicativos</a:t>
+            </a:r>
+            <a:r>
+              <a:rPr lang="en-US" sz="1400" dirty="0">
+                <a:latin typeface="Verdana" panose="020B0604030504040204" pitchFamily="34" charset="0"/>
+                <a:ea typeface="Verdana" panose="020B0604030504040204" pitchFamily="34" charset="0"/>
+              </a:rPr>
+              <a:t> </a:t>
+            </a:r>
+            <a:r>
+              <a:rPr lang="en-US" sz="1400" dirty="0" err="1">
+                <a:latin typeface="Verdana" panose="020B0604030504040204" pitchFamily="34" charset="0"/>
+                <a:ea typeface="Verdana" panose="020B0604030504040204" pitchFamily="34" charset="0"/>
+              </a:rPr>
+              <a:t>governamentais</a:t>
+            </a:r>
+            <a:r>
+              <a:rPr lang="en-US" sz="1400" dirty="0">
+                <a:latin typeface="Verdana" panose="020B0604030504040204" pitchFamily="34" charset="0"/>
+                <a:ea typeface="Verdana" panose="020B0604030504040204" pitchFamily="34" charset="0"/>
+              </a:rPr>
+              <a:t>.</a:t>
+            </a:r>
             <a:endParaRPr lang="pt-BR" sz="1400" dirty="0">
-              <a:latin typeface="Verdana" pitchFamily="34" charset="0"/>
-              <a:ea typeface="Verdana" pitchFamily="34" charset="0"/>
+              <a:latin typeface="Verdana" panose="020B0604030504040204" pitchFamily="34" charset="0"/>
+              <a:ea typeface="Verdana" panose="020B0604030504040204" pitchFamily="34" charset="0"/>
             </a:endParaRPr>
           </a:p>
           <a:p>
@@ -9908,15 +10696,6 @@
 </file>
 
 <file path=customXml/item1.xml><?xml version="1.0" encoding="utf-8"?>
-<?mso-contentType ?>
-<FormTemplates xmlns="http://schemas.microsoft.com/sharepoint/v3/contenttype/forms">
-  <Display>DocumentLibraryForm</Display>
-  <Edit>DocumentLibraryForm</Edit>
-  <New>DocumentLibraryForm</New>
-</FormTemplates>
-</file>
-
-<file path=customXml/item2.xml><?xml version="1.0" encoding="utf-8"?>
 <ct:contentTypeSchema xmlns:ct="http://schemas.microsoft.com/office/2006/metadata/contentType" xmlns:ma="http://schemas.microsoft.com/office/2006/metadata/properties/metaAttributes" ct:_="" ma:_="" ma:contentTypeName="Documento" ma:contentTypeID="0x0101001DAED1B117F6894D909B25A69A4597D2" ma:contentTypeVersion="11" ma:contentTypeDescription="Crie um novo documento." ma:contentTypeScope="" ma:versionID="fc0e1081098a96f1fc26b259e7bbb1c8">
   <xsd:schema xmlns:xsd="http://www.w3.org/2001/XMLSchema" xmlns:xs="http://www.w3.org/2001/XMLSchema" xmlns:p="http://schemas.microsoft.com/office/2006/metadata/properties" xmlns:ns2="0cd93fe2-0880-41f5-aab4-f958682b72cb" xmlns:ns3="18000554-2c77-4cf4-9366-a485aa9d7e35" targetNamespace="http://schemas.microsoft.com/office/2006/metadata/properties" ma:root="true" ma:fieldsID="f39cd65ee00b5e4c5dd2756fb7575f2f" ns2:_="" ns3:_="">
     <xsd:import namespace="0cd93fe2-0880-41f5-aab4-f958682b72cb"/>
@@ -10127,15 +10906,16 @@
 </ct:contentTypeSchema>
 </file>
 
-<file path=customXml/itemProps1.xml><?xml version="1.0" encoding="utf-8"?>
-<ds:datastoreItem xmlns:ds="http://schemas.openxmlformats.org/officeDocument/2006/customXml" ds:itemID="{A4661556-5590-415F-9315-F9BACBDA7B81}">
-  <ds:schemaRefs>
-    <ds:schemaRef ds:uri="http://schemas.microsoft.com/sharepoint/v3/contenttype/forms"/>
-  </ds:schemaRefs>
-</ds:datastoreItem>
+<file path=customXml/item2.xml><?xml version="1.0" encoding="utf-8"?>
+<?mso-contentType ?>
+<FormTemplates xmlns="http://schemas.microsoft.com/sharepoint/v3/contenttype/forms">
+  <Display>DocumentLibraryForm</Display>
+  <Edit>DocumentLibraryForm</Edit>
+  <New>DocumentLibraryForm</New>
+</FormTemplates>
 </file>
 
-<file path=customXml/itemProps2.xml><?xml version="1.0" encoding="utf-8"?>
+<file path=customXml/itemProps1.xml><?xml version="1.0" encoding="utf-8"?>
 <ds:datastoreItem xmlns:ds="http://schemas.openxmlformats.org/officeDocument/2006/customXml" ds:itemID="{CEB3752F-42B6-452F-9AAE-531B32224585}">
   <ds:schemaRefs>
     <ds:schemaRef ds:uri="http://schemas.microsoft.com/office/2006/metadata/contentType"/>
@@ -10152,4 +10932,12 @@
     <ds:schemaRef ds:uri="http://schemas.microsoft.com/internal/obd"/>
   </ds:schemaRefs>
 </ds:datastoreItem>
+</file>
+
+<file path=customXml/itemProps2.xml><?xml version="1.0" encoding="utf-8"?>
+<ds:datastoreItem xmlns:ds="http://schemas.openxmlformats.org/officeDocument/2006/customXml" ds:itemID="{A4661556-5590-415F-9315-F9BACBDA7B81}">
+  <ds:schemaRefs>
+    <ds:schemaRef ds:uri="http://schemas.microsoft.com/sharepoint/v3/contenttype/forms"/>
+  </ds:schemaRefs>
+</ds:datastoreItem>
 </file>